--- a/downloads/DCT_V2_Ch05_Slides.pptx
+++ b/downloads/DCT_V2_Ch05_Slides.pptx
@@ -130,7 +130,7 @@
   <p:extLst>
     <p:ext uri="{521415D9-36F7-43E2-AB2F-B90AF26B5E84}">
       <p14:sectionLst xmlns:p14="http://schemas.microsoft.com/office/powerpoint/2010/main">
-        <p14:section name="Opening" id="{1f8d476f-a222-26f6-e515-48b2033914e6}">
+        <p14:section name="Opening" id="{76a81bf6-c73d-ec20-e0a4-7461225b40d4}">
           <p14:sldIdLst>
             <p14:sldId id="256"/>
             <p14:sldId id="257"/>
@@ -138,42 +138,42 @@
             <p14:sldId id="259"/>
           </p14:sldIdLst>
         </p14:section>
-        <p14:section name="5.1 What Time Adds" id="{4e093deb-719b-084a-865d-972ca71c9175}">
+        <p14:section name="5.1 What Time Adds" id="{73a11bb3-1b0f-a2d5-d6c5-d5ad47929387}">
           <p14:sldIdLst>
             <p14:sldId id="260"/>
             <p14:sldId id="261"/>
           </p14:sldIdLst>
         </p14:section>
-        <p14:section name="5.2 Dynamic Instances" id="{b36d2d1b-d748-f645-0094-f9fbaa95a79d}">
+        <p14:section name="5.2 Dynamic Instances" id="{aa5aa8e7-55d7-f23a-10c5-3a251dd5fa63}">
           <p14:sldIdLst>
             <p14:sldId id="262"/>
             <p14:sldId id="263"/>
           </p14:sldIdLst>
         </p14:section>
-        <p14:section name="5.3 Transcription" id="{be3e6be7-8164-475a-81ab-c15138e16ac5}">
+        <p14:section name="5.3 Transcription" id="{a6c3f28d-1309-2ffb-c768-ff8670ac5f43}">
           <p14:sldIdLst>
             <p14:sldId id="264"/>
             <p14:sldId id="265"/>
           </p14:sldIdLst>
         </p14:section>
-        <p14:section name="5.4 Prices over Time" id="{54982e81-5908-a909-132c-a48e2f38ccbb}">
+        <p14:section name="5.4 Prices over Time" id="{f68d365d-e0b5-3ad3-568b-87d3204a6185}">
           <p14:sldIdLst>
             <p14:sldId id="266"/>
             <p14:sldId id="267"/>
           </p14:sldIdLst>
         </p14:section>
-        <p14:section name="5.5 Horizons and Terminal Values" id="{075317d5-f9ab-0993-ea07-ae452019f4ff}">
+        <p14:section name="5.5 Horizons and Terminal Values" id="{e8dbf1a3-8401-a694-4a35-b73645bc2b39}">
           <p14:sldIdLst>
             <p14:sldId id="268"/>
           </p14:sldIdLst>
         </p14:section>
-        <p14:section name="5.6 Plans, Rules, and Re-planning" id="{6f330362-47a8-6480-2522-d9278fe3586d}">
+        <p14:section name="5.6 Plans, Rules, and Re-planning" id="{4928654d-90a8-7519-f98f-e8bba694dec8}">
           <p14:sldIdLst>
             <p14:sldId id="269"/>
             <p14:sldId id="270"/>
           </p14:sldIdLst>
         </p14:section>
-        <p14:section name="Worked Example 5.1" id="{eca46c99-8c84-44da-a2f6-90cd44423bb2}">
+        <p14:section name="Worked Example 5.1" id="{fed44425-6afc-e6b2-771e-14aa01459120}">
           <p14:sldIdLst>
             <p14:sldId id="271"/>
             <p14:sldId id="272"/>
@@ -182,12 +182,12 @@
             <p14:sldId id="275"/>
           </p14:sldIdLst>
         </p14:section>
-        <p14:section name="AXIOM Lab 2.5" id="{427649f6-00d9-b14d-074b-bcc779c4f42e}">
+        <p14:section name="AXIOM Lab 2.5" id="{1d98b8ca-57a1-85d9-1585-d5b5adaed40d}">
           <p14:sldIdLst>
             <p14:sldId id="276"/>
           </p14:sldIdLst>
         </p14:section>
-        <p14:section name="Close" id="{5a286ca6-415e-3a5c-3f60-ea769fea15c4}">
+        <p14:section name="Close" id="{7c438929-ab59-0973-5509-a98c6d7012df}">
           <p14:sldIdLst>
             <p14:sldId id="277"/>
             <p14:sldId id="278"/>

--- a/downloads/DCT_V2_Ch05_Slides.pptx
+++ b/downloads/DCT_V2_Ch05_Slides.pptx
@@ -130,7 +130,7 @@
   <p:extLst>
     <p:ext uri="{521415D9-36F7-43E2-AB2F-B90AF26B5E84}">
       <p14:sectionLst xmlns:p14="http://schemas.microsoft.com/office/powerpoint/2010/main">
-        <p14:section name="Opening" id="{76a81bf6-c73d-ec20-e0a4-7461225b40d4}">
+        <p14:section name="Opening" id="{6769d29e-f396-1f48-0fe3-d1638a06e99a}">
           <p14:sldIdLst>
             <p14:sldId id="256"/>
             <p14:sldId id="257"/>
@@ -138,42 +138,42 @@
             <p14:sldId id="259"/>
           </p14:sldIdLst>
         </p14:section>
-        <p14:section name="5.1 What Time Adds" id="{73a11bb3-1b0f-a2d5-d6c5-d5ad47929387}">
+        <p14:section name="5.1 What Time Adds" id="{d6c358ca-3685-ca1b-d772-86bcf1da86a7}">
           <p14:sldIdLst>
             <p14:sldId id="260"/>
             <p14:sldId id="261"/>
           </p14:sldIdLst>
         </p14:section>
-        <p14:section name="5.2 Dynamic Instances" id="{aa5aa8e7-55d7-f23a-10c5-3a251dd5fa63}">
+        <p14:section name="5.2 Dynamic Instances" id="{0d664825-4ee7-3604-ad4a-ab48eca3a510}">
           <p14:sldIdLst>
             <p14:sldId id="262"/>
             <p14:sldId id="263"/>
           </p14:sldIdLst>
         </p14:section>
-        <p14:section name="5.3 Transcription" id="{a6c3f28d-1309-2ffb-c768-ff8670ac5f43}">
+        <p14:section name="5.3 Transcription" id="{98b29b6d-b7f4-1828-1088-cb57fae834ba}">
           <p14:sldIdLst>
             <p14:sldId id="264"/>
             <p14:sldId id="265"/>
           </p14:sldIdLst>
         </p14:section>
-        <p14:section name="5.4 Prices over Time" id="{f68d365d-e0b5-3ad3-568b-87d3204a6185}">
+        <p14:section name="5.4 Prices over Time" id="{a2f4ff2b-21a6-090d-1200-d836be5f0496}">
           <p14:sldIdLst>
             <p14:sldId id="266"/>
             <p14:sldId id="267"/>
           </p14:sldIdLst>
         </p14:section>
-        <p14:section name="5.5 Horizons and Terminal Values" id="{e8dbf1a3-8401-a694-4a35-b73645bc2b39}">
+        <p14:section name="5.5 Horizons and Terminal Values" id="{97bec828-103e-95c7-9c9f-f4411cd65170}">
           <p14:sldIdLst>
             <p14:sldId id="268"/>
           </p14:sldIdLst>
         </p14:section>
-        <p14:section name="5.6 Plans, Rules, and Re-planning" id="{4928654d-90a8-7519-f98f-e8bba694dec8}">
+        <p14:section name="5.6 Plans, Rules, and Re-planning" id="{88808493-e1db-ac28-5e06-98d047d64afe}">
           <p14:sldIdLst>
             <p14:sldId id="269"/>
             <p14:sldId id="270"/>
           </p14:sldIdLst>
         </p14:section>
-        <p14:section name="Worked Example 5.1" id="{fed44425-6afc-e6b2-771e-14aa01459120}">
+        <p14:section name="Worked Example 5.1" id="{9816609e-fea6-8e54-e669-c0c8b4797aa2}">
           <p14:sldIdLst>
             <p14:sldId id="271"/>
             <p14:sldId id="272"/>
@@ -182,12 +182,12 @@
             <p14:sldId id="275"/>
           </p14:sldIdLst>
         </p14:section>
-        <p14:section name="AXIOM Lab 2.5" id="{1d98b8ca-57a1-85d9-1585-d5b5adaed40d}">
+        <p14:section name="AXIOM Lab 2.5" id="{ac8cbc0d-8fa3-7e61-02d9-403489e1f1c7}">
           <p14:sldIdLst>
             <p14:sldId id="276"/>
           </p14:sldIdLst>
         </p14:section>
-        <p14:section name="Close" id="{7c438929-ab59-0973-5509-a98c6d7012df}">
+        <p14:section name="Close" id="{d7563de0-9558-c602-6a17-09beb4b0d1a1}">
           <p14:sldIdLst>
             <p14:sldId id="277"/>
             <p14:sldId id="278"/>

--- a/downloads/DCT_V2_Ch05_Slides.pptx
+++ b/downloads/DCT_V2_Ch05_Slides.pptx
@@ -29,9 +29,10 @@
     <p:sldId id="277" r:id="rId23"/>
     <p:sldId id="278" r:id="rId24"/>
     <p:sldId id="279" r:id="rId25"/>
+    <p:sldId id="280" r:id="rId26"/>
   </p:sldIdLst>
   <p:notesMasterIdLst>
-    <p:notesMasterId r:id="rId26"/>
+    <p:notesMasterId r:id="rId27"/>
   </p:notesMasterIdLst>
   <p:sldSz cx="12192000" cy="6858000"/>
   <p:notesSz cx="6858000" cy="12192000"/>
@@ -130,7 +131,7 @@
   <p:extLst>
     <p:ext uri="{521415D9-36F7-43E2-AB2F-B90AF26B5E84}">
       <p14:sectionLst xmlns:p14="http://schemas.microsoft.com/office/powerpoint/2010/main">
-        <p14:section name="Opening" id="{6769d29e-f396-1f48-0fe3-d1638a06e99a}">
+        <p14:section name="Opening" id="{a0c3b66d-203d-3b39-73c3-ec9b26a80f52}">
           <p14:sldIdLst>
             <p14:sldId id="256"/>
             <p14:sldId id="257"/>
@@ -138,42 +139,42 @@
             <p14:sldId id="259"/>
           </p14:sldIdLst>
         </p14:section>
-        <p14:section name="5.1 What Time Adds" id="{d6c358ca-3685-ca1b-d772-86bcf1da86a7}">
+        <p14:section name="5.1 What Time Adds" id="{0d564c07-ae50-594b-3ea8-0f98c1ed87da}">
           <p14:sldIdLst>
             <p14:sldId id="260"/>
             <p14:sldId id="261"/>
           </p14:sldIdLst>
         </p14:section>
-        <p14:section name="5.2 Dynamic Instances" id="{0d664825-4ee7-3604-ad4a-ab48eca3a510}">
+        <p14:section name="5.2 Dynamic Instances" id="{b139b1bc-d951-4ca1-9d94-a4eff876da7e}">
           <p14:sldIdLst>
             <p14:sldId id="262"/>
             <p14:sldId id="263"/>
           </p14:sldIdLst>
         </p14:section>
-        <p14:section name="5.3 Transcription" id="{98b29b6d-b7f4-1828-1088-cb57fae834ba}">
+        <p14:section name="5.3 Transcription" id="{b715f1a1-f1e9-1902-aca3-2a334936feec}">
           <p14:sldIdLst>
             <p14:sldId id="264"/>
             <p14:sldId id="265"/>
           </p14:sldIdLst>
         </p14:section>
-        <p14:section name="5.4 Prices over Time" id="{a2f4ff2b-21a6-090d-1200-d836be5f0496}">
+        <p14:section name="5.4 Prices over Time" id="{5b06543e-1d9f-a1b5-5a05-ff311f6d837d}">
           <p14:sldIdLst>
             <p14:sldId id="266"/>
             <p14:sldId id="267"/>
           </p14:sldIdLst>
         </p14:section>
-        <p14:section name="5.5 Horizons and Terminal Values" id="{97bec828-103e-95c7-9c9f-f4411cd65170}">
+        <p14:section name="5.5 Horizons and Terminal Values" id="{495e00ef-8cca-1ad6-7e9a-064d2b988929}">
           <p14:sldIdLst>
             <p14:sldId id="268"/>
           </p14:sldIdLst>
         </p14:section>
-        <p14:section name="5.6 Plans, Rules, and Re-planning" id="{88808493-e1db-ac28-5e06-98d047d64afe}">
+        <p14:section name="5.6 Plans, Rules, and Re-planning" id="{1abed9d1-15e1-b2c1-6367-24ae77d27441}">
           <p14:sldIdLst>
             <p14:sldId id="269"/>
             <p14:sldId id="270"/>
           </p14:sldIdLst>
         </p14:section>
-        <p14:section name="Worked Example 5.1" id="{9816609e-fea6-8e54-e669-c0c8b4797aa2}">
+        <p14:section name="Worked Example 5.1" id="{39ee31ed-cf17-dadf-186e-65d59cb258ab}">
           <p14:sldIdLst>
             <p14:sldId id="271"/>
             <p14:sldId id="272"/>
@@ -182,16 +183,21 @@
             <p14:sldId id="275"/>
           </p14:sldIdLst>
         </p14:section>
-        <p14:section name="AXIOM Lab 2.5" id="{ac8cbc0d-8fa3-7e61-02d9-403489e1f1c7}">
+        <p14:section name="In Practice" id="{54e25bf4-21b6-a397-1b6c-37ee5cf8a8fd}">
           <p14:sldIdLst>
             <p14:sldId id="276"/>
           </p14:sldIdLst>
         </p14:section>
-        <p14:section name="Close" id="{d7563de0-9558-c602-6a17-09beb4b0d1a1}">
+        <p14:section name="AXIOM Lab 2.5" id="{a6498945-9d29-0fb2-551e-67adf8ef3cea}">
           <p14:sldIdLst>
             <p14:sldId id="277"/>
+          </p14:sldIdLst>
+        </p14:section>
+        <p14:section name="Close" id="{ee945344-675a-83c5-248e-772977dde666}">
+          <p14:sldIdLst>
             <p14:sldId id="278"/>
             <p14:sldId id="279"/>
+            <p14:sldId id="280"/>
           </p14:sldIdLst>
         </p14:section>
       </p14:sectionLst>
@@ -2030,7 +2036,7 @@
           <a:p>
             <a:r>
               <a:rPr lang="en-US" dirty="0"/>
-              <a:t>AXIOM Lab 2.5. What to look for: a myopic rule that stops the program; a transcription whose multipliers are the prices of cash and efficiency; a war chest that front-loads payouts; rounds that appear and disappear with the horizon and the rate; a rule that survives the shortfall that breaks the schedule.</a:t>
+              <a:t>In Practice, Chapter 5: Zara Re-plans Its Clearance Every Week. A real organization's decision of this chapter's kind, told from its published record; every figure is cited in the book. The lesson for Meridian: Re-planning from the measured state is a rule, and a terminal value says what the leftover stock is worth. Sources: Caro and Gallien (2011, 2012), Operations Research; Carboni Borrasé (2009), MIT thesis; Caro, Babio and Peña (2019).</a:t>
             </a:r>
             <a:endParaRPr lang="en-US" dirty="0"/>
           </a:p>
@@ -2118,7 +2124,7 @@
           <a:p>
             <a:r>
               <a:rPr lang="en-US" dirty="0"/>
-              <a:t>Key Takeaways, Chapter 5.</a:t>
+              <a:t>AXIOM Lab 2.5. What to look for: a myopic rule that stops the program; a transcription whose multipliers are the prices of cash and efficiency; a war chest that front-loads payouts; rounds that appear and disappear with the horizon and the rate; a rule that survives the shortfall that breaks the schedule.</a:t>
             </a:r>
             <a:endParaRPr lang="en-US" dirty="0"/>
           </a:p>
@@ -2206,7 +2212,7 @@
           <a:p>
             <a:r>
               <a:rPr lang="en-US" dirty="0"/>
-              <a:t>The notebook and workbook are on the course website, www.dynamiccorporatetransformation.com.</a:t>
+              <a:t>Key Takeaways, Chapter 5.</a:t>
             </a:r>
             <a:endParaRPr lang="en-US" dirty="0"/>
           </a:p>
@@ -2294,7 +2300,7 @@
           <a:p>
             <a:r>
               <a:rPr lang="en-US" dirty="0"/>
-              <a:t>Chapter 6, Optimal Control of Enterprise Systems, develops the repair of myopia that Theorem 5.1(iii) names: the maximum principle.</a:t>
+              <a:t>The notebook and workbook are on the course website, www.dynamiccorporatetransformation.com.</a:t>
             </a:r>
             <a:endParaRPr lang="en-US" dirty="0"/>
           </a:p>
@@ -2318,6 +2324,94 @@
             <a:fld id="{F7021451-1387-4CA6-816F-3879F97B5CBC}" type="slidenum">
               <a:rPr lang="en-US"/>
               <a:t>24</a:t>
+            </a:fld>
+            <a:endParaRPr lang="en-US"/>
+          </a:p>
+        </p:txBody>
+      </p:sp>
+    </p:spTree>
+    <p:extLst>
+      <p:ext uri="{BB962C8B-B14F-4D97-AF65-F5344CB8AC3E}">
+        <p14:creationId xmlns:p14="http://schemas.microsoft.com/office/powerpoint/2010/main" val="1024086991"/>
+      </p:ext>
+    </p:extLst>
+  </p:cSld>
+  <p:clrMapOvr>
+    <a:masterClrMapping/>
+  </p:clrMapOvr>
+</p:notes>
+</file>
+
+<file path=ppt/notesSlides/notesSlide25.xml><?xml version="1.0" encoding="utf-8"?>
+<p:notes xmlns:a="http://schemas.openxmlformats.org/drawingml/2006/main" xmlns:r="http://schemas.openxmlformats.org/officeDocument/2006/relationships" xmlns:p="http://schemas.openxmlformats.org/presentationml/2006/main">
+  <p:cSld>
+    <p:spTree>
+      <p:nvGrpSpPr>
+        <p:cNvPr id="1" name=""/>
+        <p:cNvGrpSpPr/>
+        <p:nvPr/>
+      </p:nvGrpSpPr>
+      <p:grpSpPr>
+        <a:xfrm>
+          <a:off x="0" y="0"/>
+          <a:ext cx="0" cy="0"/>
+          <a:chOff x="0" y="0"/>
+          <a:chExt cx="0" cy="0"/>
+        </a:xfrm>
+      </p:grpSpPr>
+      <p:sp>
+        <p:nvSpPr>
+          <p:cNvPr id="2" name="Slide Image Placeholder 1"/>
+          <p:cNvSpPr>
+            <a:spLocks noGrp="1" noRot="1" noChangeAspect="1"/>
+          </p:cNvSpPr>
+          <p:nvPr>
+            <p:ph type="sldImg"/>
+          </p:nvPr>
+        </p:nvSpPr>
+        <p:spPr/>
+      </p:sp>
+      <p:sp>
+        <p:nvSpPr>
+          <p:cNvPr id="3" name="Notes Placeholder 2"/>
+          <p:cNvSpPr>
+            <a:spLocks noGrp="1"/>
+          </p:cNvSpPr>
+          <p:nvPr>
+            <p:ph type="body" idx="1"/>
+          </p:nvPr>
+        </p:nvSpPr>
+        <p:spPr/>
+        <p:txBody>
+          <a:bodyPr/>
+          <a:lstStyle/>
+          <a:p>
+            <a:r>
+              <a:rPr lang="en-US" dirty="0"/>
+              <a:t>Chapter 6, Optimal Control of Enterprise Systems, develops the repair of myopia that Theorem 5.1(iii) names: the maximum principle.</a:t>
+            </a:r>
+            <a:endParaRPr lang="en-US" dirty="0"/>
+          </a:p>
+        </p:txBody>
+      </p:sp>
+      <p:sp>
+        <p:nvSpPr>
+          <p:cNvPr id="4" name="Slide Number Placeholder 3"/>
+          <p:cNvSpPr>
+            <a:spLocks noGrp="1"/>
+          </p:cNvSpPr>
+          <p:nvPr>
+            <p:ph type="sldNum" sz="quarter" idx="10"/>
+          </p:nvPr>
+        </p:nvSpPr>
+        <p:spPr/>
+        <p:txBody>
+          <a:bodyPr/>
+          <a:lstStyle/>
+          <a:p>
+            <a:fld id="{F7021451-1387-4CA6-816F-3879F97B5CBC}" type="slidenum">
+              <a:rPr lang="en-US"/>
+              <a:t>25</a:t>
             </a:fld>
             <a:endParaRPr lang="en-US"/>
           </a:p>
@@ -11422,7 +11516,7 @@
                   <a:schemeClr val="accent1"/>
                 </a:solidFill>
               </a:rPr>
-              <a:t>AXIOM LAB 2.5 · MODULE AXIOM-05</a:t>
+              <a:t>IN PRACTICE · ZARA</a:t>
             </a:r>
             <a:endParaRPr lang="en-US" sz="1200" dirty="0"/>
           </a:p>
@@ -11463,804 +11557,26 @@
                 <a:ea typeface="Cambria" pitchFamily="34" charset="-122"/>
                 <a:cs typeface="Cambria" pitchFamily="34" charset="-120"/>
               </a:rPr>
-              <a:t>Planning over time, in AXIOM</a:t>
+              <a:t>Zara re-plans its markdowns every week</a:t>
             </a:r>
             <a:endParaRPr lang="en-US" sz="3200" dirty="0"/>
           </a:p>
         </p:txBody>
       </p:sp>
-      <p:pic>
-        <p:nvPicPr>
-          <p:cNvPr id="5" name="AXIOM logo" descr="AXIOM">    </p:cNvPr>
-          <p:cNvPicPr>
-            <a:picLocks noChangeAspect="1"/>
-          </p:cNvPicPr>
-          <p:nvPr/>
-        </p:nvPicPr>
-        <p:blipFill>
-          <a:blip r:embed="rId1"/>
-          <a:stretch>
-            <a:fillRect/>
-          </a:stretch>
-        </p:blipFill>
-        <p:spPr>
-          <a:xfrm>
-            <a:off x="9539935" y="310896"/>
-            <a:ext cx="2103120" cy="420624"/>
-          </a:xfrm>
-          <a:prstGeom prst="rect">
-            <a:avLst/>
-          </a:prstGeom>
-        </p:spPr>
-      </p:pic>
-      <p:sp>
-        <p:nvSpPr>
-          <p:cNvPr id="6" name="Situation"/>
-          <p:cNvSpPr txBox="1"/>
-          <p:nvPr/>
-        </p:nvSpPr>
-        <p:spPr>
-          <a:xfrm>
-            <a:off x="548640" y="1645920"/>
-            <a:ext cx="11094415" cy="777240"/>
-          </a:xfrm>
-          <a:prstGeom prst="rect">
-            <a:avLst/>
-          </a:prstGeom>
-          <a:noFill/>
-          <a:ln/>
-        </p:spPr>
-        <p:txBody>
-          <a:bodyPr wrap="square" lIns="0" tIns="0" rIns="0" bIns="0" rtlCol="0" anchor="t"/>
-          <a:lstStyle/>
-          <a:p>
-            <a:pPr indent="0" marL="0">
-              <a:buNone/>
-            </a:pPr>
-            <a:r>
-              <a:rPr lang="en-US" sz="1500" dirty="0">
-                <a:solidFill>
-                  <a:schemeClr val="tx1"/>
-                </a:solidFill>
-              </a:rPr>
-              <a:t>Meridian's board has asked when the automation program's cash should go to shareholders. The CFO favors paying out everything above the floor; the program office wants cash held for the rounds. Open AXIOM, choose Lab 2.5 and load the Meridian automation instance.</a:t>
-            </a:r>
-            <a:endParaRPr lang="en-US" sz="1500" dirty="0"/>
-          </a:p>
-        </p:txBody>
-      </p:sp>
-      <p:sp>
-        <p:nvSpPr>
-          <p:cNvPr id="7" name="Flow line"/>
+      <p:sp>
+        <p:nvSpPr>
+          <p:cNvPr id="5" name="Card"/>
           <p:cNvSpPr/>
           <p:nvPr/>
         </p:nvSpPr>
         <p:spPr>
           <a:xfrm>
-            <a:off x="1658082" y="2880360"/>
-            <a:ext cx="8875532" cy="0"/>
-          </a:xfrm>
-          <a:prstGeom prst="line">
-            <a:avLst/>
-          </a:prstGeom>
-          <a:noFill/>
-          <a:ln w="25400">
-            <a:solidFill>
-              <a:srgbClr val="C4CBD8"/>
-            </a:solidFill>
-            <a:prstDash val="solid"/>
-          </a:ln>
-        </p:spPr>
-      </p:sp>
-      <p:sp>
-        <p:nvSpPr>
-          <p:cNvPr id="8" name="Number"/>
-          <p:cNvSpPr/>
-          <p:nvPr/>
-        </p:nvSpPr>
-        <p:spPr>
-          <a:xfrm>
-            <a:off x="1383762" y="2606040"/>
-            <a:ext cx="548640" cy="548640"/>
-          </a:xfrm>
-          <a:prstGeom prst="ellipse">
-            <a:avLst/>
-          </a:prstGeom>
-          <a:solidFill>
-            <a:schemeClr val="accent1"/>
-          </a:solidFill>
-          <a:ln w="6350">
-            <a:solidFill>
-              <a:schemeClr val="accent1"/>
-            </a:solidFill>
-            <a:prstDash val="solid"/>
-          </a:ln>
-        </p:spPr>
-      </p:sp>
-      <p:sp>
-        <p:nvSpPr>
-          <p:cNvPr id="9" name="Text 5"/>
-          <p:cNvSpPr txBox="1"/>
-          <p:nvPr/>
-        </p:nvSpPr>
-        <p:spPr>
-          <a:xfrm>
-            <a:off x="1383762" y="2606040"/>
-            <a:ext cx="548640" cy="548640"/>
-          </a:xfrm>
-          <a:prstGeom prst="rect">
-            <a:avLst/>
-          </a:prstGeom>
-          <a:noFill/>
-          <a:ln/>
-        </p:spPr>
-        <p:txBody>
-          <a:bodyPr wrap="square" lIns="0" tIns="0" rIns="0" bIns="0" rtlCol="0" anchor="ctr"/>
-          <a:lstStyle/>
-          <a:p>
-            <a:pPr algn="ctr" indent="0" marL="0">
-              <a:buNone/>
-            </a:pPr>
-            <a:r>
-              <a:rPr lang="en-US" sz="1600" b="1" dirty="0">
-                <a:solidFill>
-                  <a:schemeClr val="bg1"/>
-                </a:solidFill>
-                <a:latin typeface="Calibri" pitchFamily="34" charset="0"/>
-                <a:ea typeface="Calibri" pitchFamily="34" charset="-122"/>
-                <a:cs typeface="Calibri" pitchFamily="34" charset="-120"/>
-              </a:rPr>
-              <a:t>1</a:t>
-            </a:r>
-            <a:endParaRPr lang="en-US" sz="1600" dirty="0"/>
-          </a:p>
-        </p:txBody>
-      </p:sp>
-      <p:sp>
-        <p:nvSpPr>
-          <p:cNvPr id="10" name="Flow head"/>
-          <p:cNvSpPr txBox="1"/>
-          <p:nvPr/>
-        </p:nvSpPr>
-        <p:spPr>
-          <a:xfrm>
-            <a:off x="621792" y="3291840"/>
-            <a:ext cx="2072579" cy="548640"/>
-          </a:xfrm>
-          <a:prstGeom prst="rect">
-            <a:avLst/>
-          </a:prstGeom>
-          <a:noFill/>
-          <a:ln/>
-        </p:spPr>
-        <p:txBody>
-          <a:bodyPr wrap="square" lIns="0" tIns="0" rIns="0" bIns="0" rtlCol="0" anchor="t"/>
-          <a:lstStyle/>
-          <a:p>
-            <a:pPr algn="ctr" indent="0" marL="0">
-              <a:buNone/>
-            </a:pPr>
-            <a:r>
-              <a:rPr lang="en-US" sz="1600" b="1" dirty="0">
-                <a:solidFill>
-                  <a:schemeClr val="tx1"/>
-                </a:solidFill>
-                <a:latin typeface="Cambria" pitchFamily="34" charset="0"/>
-                <a:ea typeface="Cambria" pitchFamily="34" charset="-122"/>
-                <a:cs typeface="Cambria" pitchFamily="34" charset="-120"/>
-              </a:rPr>
-              <a:t>Simulate</a:t>
-            </a:r>
-            <a:endParaRPr lang="en-US" sz="1600" dirty="0"/>
-          </a:p>
-        </p:txBody>
-      </p:sp>
-      <p:sp>
-        <p:nvSpPr>
-          <p:cNvPr id="11" name="Flow text"/>
-          <p:cNvSpPr txBox="1"/>
-          <p:nvPr/>
-        </p:nvSpPr>
-        <p:spPr>
-          <a:xfrm>
-            <a:off x="640080" y="3867912"/>
-            <a:ext cx="2036003" cy="1554480"/>
-          </a:xfrm>
-          <a:prstGeom prst="rect">
-            <a:avLst/>
-          </a:prstGeom>
-          <a:noFill/>
-          <a:ln/>
-        </p:spPr>
-        <p:txBody>
-          <a:bodyPr wrap="square" lIns="0" tIns="0" rIns="0" bIns="0" rtlCol="0" anchor="t"/>
-          <a:lstStyle/>
-          <a:p>
-            <a:pPr algn="ctr" indent="0" marL="0">
-              <a:buNone/>
-            </a:pPr>
-            <a:r>
-              <a:rPr lang="en-US" sz="1400" dirty="0">
-                <a:solidFill>
-                  <a:schemeClr val="tx2"/>
-                </a:solidFill>
-              </a:rPr>
-              <a:t>Run the CFO's rule and the war-chest rule; watch cash against the floor and the $470m line.</a:t>
-            </a:r>
-            <a:endParaRPr lang="en-US" sz="1400" dirty="0"/>
-          </a:p>
-        </p:txBody>
-      </p:sp>
-      <p:sp>
-        <p:nvSpPr>
-          <p:cNvPr id="12" name="Number"/>
-          <p:cNvSpPr/>
-          <p:nvPr/>
-        </p:nvSpPr>
-        <p:spPr>
-          <a:xfrm>
-            <a:off x="3602645" y="2606040"/>
-            <a:ext cx="548640" cy="548640"/>
-          </a:xfrm>
-          <a:prstGeom prst="ellipse">
-            <a:avLst/>
-          </a:prstGeom>
-          <a:solidFill>
-            <a:schemeClr val="accent1"/>
-          </a:solidFill>
-          <a:ln w="6350">
-            <a:solidFill>
-              <a:schemeClr val="accent1"/>
-            </a:solidFill>
-            <a:prstDash val="solid"/>
-          </a:ln>
-        </p:spPr>
-      </p:sp>
-      <p:sp>
-        <p:nvSpPr>
-          <p:cNvPr id="13" name="Text 9"/>
-          <p:cNvSpPr txBox="1"/>
-          <p:nvPr/>
-        </p:nvSpPr>
-        <p:spPr>
-          <a:xfrm>
-            <a:off x="3602645" y="2606040"/>
-            <a:ext cx="548640" cy="548640"/>
-          </a:xfrm>
-          <a:prstGeom prst="rect">
-            <a:avLst/>
-          </a:prstGeom>
-          <a:noFill/>
-          <a:ln/>
-        </p:spPr>
-        <p:txBody>
-          <a:bodyPr wrap="square" lIns="0" tIns="0" rIns="0" bIns="0" rtlCol="0" anchor="ctr"/>
-          <a:lstStyle/>
-          <a:p>
-            <a:pPr algn="ctr" indent="0" marL="0">
-              <a:buNone/>
-            </a:pPr>
-            <a:r>
-              <a:rPr lang="en-US" sz="1600" b="1" dirty="0">
-                <a:solidFill>
-                  <a:schemeClr val="bg1"/>
-                </a:solidFill>
-                <a:latin typeface="Calibri" pitchFamily="34" charset="0"/>
-                <a:ea typeface="Calibri" pitchFamily="34" charset="-122"/>
-                <a:cs typeface="Calibri" pitchFamily="34" charset="-120"/>
-              </a:rPr>
-              <a:t>2</a:t>
-            </a:r>
-            <a:endParaRPr lang="en-US" sz="1600" dirty="0"/>
-          </a:p>
-        </p:txBody>
-      </p:sp>
-      <p:sp>
-        <p:nvSpPr>
-          <p:cNvPr id="14" name="Flow head"/>
-          <p:cNvSpPr txBox="1"/>
-          <p:nvPr/>
-        </p:nvSpPr>
-        <p:spPr>
-          <a:xfrm>
-            <a:off x="2840675" y="3291840"/>
-            <a:ext cx="2072579" cy="548640"/>
-          </a:xfrm>
-          <a:prstGeom prst="rect">
-            <a:avLst/>
-          </a:prstGeom>
-          <a:noFill/>
-          <a:ln/>
-        </p:spPr>
-        <p:txBody>
-          <a:bodyPr wrap="square" lIns="0" tIns="0" rIns="0" bIns="0" rtlCol="0" anchor="t"/>
-          <a:lstStyle/>
-          <a:p>
-            <a:pPr algn="ctr" indent="0" marL="0">
-              <a:buNone/>
-            </a:pPr>
-            <a:r>
-              <a:rPr lang="en-US" sz="1600" b="1" dirty="0">
-                <a:solidFill>
-                  <a:schemeClr val="tx1"/>
-                </a:solidFill>
-                <a:latin typeface="Cambria" pitchFamily="34" charset="0"/>
-                <a:ea typeface="Cambria" pitchFamily="34" charset="-122"/>
-                <a:cs typeface="Cambria" pitchFamily="34" charset="-120"/>
-              </a:rPr>
-              <a:t>Transcribe</a:t>
-            </a:r>
-            <a:endParaRPr lang="en-US" sz="1600" dirty="0"/>
-          </a:p>
-        </p:txBody>
-      </p:sp>
-      <p:sp>
-        <p:nvSpPr>
-          <p:cNvPr id="15" name="Flow text"/>
-          <p:cNvSpPr txBox="1"/>
-          <p:nvPr/>
-        </p:nvSpPr>
-        <p:spPr>
-          <a:xfrm>
-            <a:off x="2858963" y="3867912"/>
-            <a:ext cx="2036003" cy="1554480"/>
-          </a:xfrm>
-          <a:prstGeom prst="rect">
-            <a:avLst/>
-          </a:prstGeom>
-          <a:noFill/>
-          <a:ln/>
-        </p:spPr>
-        <p:txBody>
-          <a:bodyPr wrap="square" lIns="0" tIns="0" rIns="0" bIns="0" rtlCol="0" anchor="t"/>
-          <a:lstStyle/>
-          <a:p>
-            <a:pPr algn="ctr" indent="0" marL="0">
-              <a:buNone/>
-            </a:pPr>
-            <a:r>
-              <a:rPr lang="en-US" sz="1400" dirty="0">
-                <a:solidFill>
-                  <a:schemeClr val="tx2"/>
-                </a:solidFill>
-              </a:rPr>
-              <a:t>Transcribe the six years and hand the program to the AXIOM-04 solvers; record the best plan.</a:t>
-            </a:r>
-            <a:endParaRPr lang="en-US" sz="1400" dirty="0"/>
-          </a:p>
-        </p:txBody>
-      </p:sp>
-      <p:sp>
-        <p:nvSpPr>
-          <p:cNvPr id="16" name="Number"/>
-          <p:cNvSpPr/>
-          <p:nvPr/>
-        </p:nvSpPr>
-        <p:spPr>
-          <a:xfrm>
-            <a:off x="5821528" y="2606040"/>
-            <a:ext cx="548640" cy="548640"/>
-          </a:xfrm>
-          <a:prstGeom prst="ellipse">
-            <a:avLst/>
-          </a:prstGeom>
-          <a:solidFill>
-            <a:schemeClr val="accent1"/>
-          </a:solidFill>
-          <a:ln w="6350">
-            <a:solidFill>
-              <a:schemeClr val="accent1"/>
-            </a:solidFill>
-            <a:prstDash val="solid"/>
-          </a:ln>
-        </p:spPr>
-      </p:sp>
-      <p:sp>
-        <p:nvSpPr>
-          <p:cNvPr id="17" name="Text 13"/>
-          <p:cNvSpPr txBox="1"/>
-          <p:nvPr/>
-        </p:nvSpPr>
-        <p:spPr>
-          <a:xfrm>
-            <a:off x="5821528" y="2606040"/>
-            <a:ext cx="548640" cy="548640"/>
-          </a:xfrm>
-          <a:prstGeom prst="rect">
-            <a:avLst/>
-          </a:prstGeom>
-          <a:noFill/>
-          <a:ln/>
-        </p:spPr>
-        <p:txBody>
-          <a:bodyPr wrap="square" lIns="0" tIns="0" rIns="0" bIns="0" rtlCol="0" anchor="ctr"/>
-          <a:lstStyle/>
-          <a:p>
-            <a:pPr algn="ctr" indent="0" marL="0">
-              <a:buNone/>
-            </a:pPr>
-            <a:r>
-              <a:rPr lang="en-US" sz="1600" b="1" dirty="0">
-                <a:solidFill>
-                  <a:schemeClr val="bg1"/>
-                </a:solidFill>
-                <a:latin typeface="Calibri" pitchFamily="34" charset="0"/>
-                <a:ea typeface="Calibri" pitchFamily="34" charset="-122"/>
-                <a:cs typeface="Calibri" pitchFamily="34" charset="-120"/>
-              </a:rPr>
-              <a:t>3</a:t>
-            </a:r>
-            <a:endParaRPr lang="en-US" sz="1600" dirty="0"/>
-          </a:p>
-        </p:txBody>
-      </p:sp>
-      <p:sp>
-        <p:nvSpPr>
-          <p:cNvPr id="18" name="Flow head"/>
-          <p:cNvSpPr txBox="1"/>
-          <p:nvPr/>
-        </p:nvSpPr>
-        <p:spPr>
-          <a:xfrm>
-            <a:off x="5059558" y="3291840"/>
-            <a:ext cx="2072579" cy="548640"/>
-          </a:xfrm>
-          <a:prstGeom prst="rect">
-            <a:avLst/>
-          </a:prstGeom>
-          <a:noFill/>
-          <a:ln/>
-        </p:spPr>
-        <p:txBody>
-          <a:bodyPr wrap="square" lIns="0" tIns="0" rIns="0" bIns="0" rtlCol="0" anchor="t"/>
-          <a:lstStyle/>
-          <a:p>
-            <a:pPr algn="ctr" indent="0" marL="0">
-              <a:buNone/>
-            </a:pPr>
-            <a:r>
-              <a:rPr lang="en-US" sz="1600" b="1" dirty="0">
-                <a:solidFill>
-                  <a:schemeClr val="tx1"/>
-                </a:solidFill>
-                <a:latin typeface="Cambria" pitchFamily="34" charset="0"/>
-                <a:ea typeface="Cambria" pitchFamily="34" charset="-122"/>
-                <a:cs typeface="Cambria" pitchFamily="34" charset="-120"/>
-              </a:rPr>
-              <a:t>Price</a:t>
-            </a:r>
-            <a:endParaRPr lang="en-US" sz="1600" dirty="0"/>
-          </a:p>
-        </p:txBody>
-      </p:sp>
-      <p:sp>
-        <p:nvSpPr>
-          <p:cNvPr id="19" name="Flow text"/>
-          <p:cNvSpPr txBox="1"/>
-          <p:nvPr/>
-        </p:nvSpPr>
-        <p:spPr>
-          <a:xfrm>
-            <a:off x="5077846" y="3867912"/>
-            <a:ext cx="2036003" cy="1554480"/>
-          </a:xfrm>
-          <a:prstGeom prst="rect">
-            <a:avLst/>
-          </a:prstGeom>
-          <a:noFill/>
-          <a:ln/>
-        </p:spPr>
-        <p:txBody>
-          <a:bodyPr wrap="square" lIns="0" tIns="0" rIns="0" bIns="0" rtlCol="0" anchor="t"/>
-          <a:lstStyle/>
-          <a:p>
-            <a:pPr algn="ctr" indent="0" marL="0">
-              <a:buNone/>
-            </a:pPr>
-            <a:r>
-              <a:rPr lang="en-US" sz="1400" dirty="0">
-                <a:solidFill>
-                  <a:schemeClr val="tx2"/>
-                </a:solidFill>
-              </a:rPr>
-              <a:t>Read the prices of cash and efficiency by year; check two by perturbing the instance.</a:t>
-            </a:r>
-            <a:endParaRPr lang="en-US" sz="1400" dirty="0"/>
-          </a:p>
-        </p:txBody>
-      </p:sp>
-      <p:sp>
-        <p:nvSpPr>
-          <p:cNvPr id="20" name="Number"/>
-          <p:cNvSpPr/>
-          <p:nvPr/>
-        </p:nvSpPr>
-        <p:spPr>
-          <a:xfrm>
-            <a:off x="8040411" y="2606040"/>
-            <a:ext cx="548640" cy="548640"/>
-          </a:xfrm>
-          <a:prstGeom prst="ellipse">
-            <a:avLst/>
-          </a:prstGeom>
-          <a:solidFill>
-            <a:schemeClr val="accent1"/>
-          </a:solidFill>
-          <a:ln w="6350">
-            <a:solidFill>
-              <a:schemeClr val="accent1"/>
-            </a:solidFill>
-            <a:prstDash val="solid"/>
-          </a:ln>
-        </p:spPr>
-      </p:sp>
-      <p:sp>
-        <p:nvSpPr>
-          <p:cNvPr id="21" name="Text 17"/>
-          <p:cNvSpPr txBox="1"/>
-          <p:nvPr/>
-        </p:nvSpPr>
-        <p:spPr>
-          <a:xfrm>
-            <a:off x="8040411" y="2606040"/>
-            <a:ext cx="548640" cy="548640"/>
-          </a:xfrm>
-          <a:prstGeom prst="rect">
-            <a:avLst/>
-          </a:prstGeom>
-          <a:noFill/>
-          <a:ln/>
-        </p:spPr>
-        <p:txBody>
-          <a:bodyPr wrap="square" lIns="0" tIns="0" rIns="0" bIns="0" rtlCol="0" anchor="ctr"/>
-          <a:lstStyle/>
-          <a:p>
-            <a:pPr algn="ctr" indent="0" marL="0">
-              <a:buNone/>
-            </a:pPr>
-            <a:r>
-              <a:rPr lang="en-US" sz="1600" b="1" dirty="0">
-                <a:solidFill>
-                  <a:schemeClr val="bg1"/>
-                </a:solidFill>
-                <a:latin typeface="Calibri" pitchFamily="34" charset="0"/>
-                <a:ea typeface="Calibri" pitchFamily="34" charset="-122"/>
-                <a:cs typeface="Calibri" pitchFamily="34" charset="-120"/>
-              </a:rPr>
-              <a:t>4</a:t>
-            </a:r>
-            <a:endParaRPr lang="en-US" sz="1600" dirty="0"/>
-          </a:p>
-        </p:txBody>
-      </p:sp>
-      <p:sp>
-        <p:nvSpPr>
-          <p:cNvPr id="22" name="Flow head"/>
-          <p:cNvSpPr txBox="1"/>
-          <p:nvPr/>
-        </p:nvSpPr>
-        <p:spPr>
-          <a:xfrm>
-            <a:off x="7278441" y="3291840"/>
-            <a:ext cx="2072579" cy="548640"/>
-          </a:xfrm>
-          <a:prstGeom prst="rect">
-            <a:avLst/>
-          </a:prstGeom>
-          <a:noFill/>
-          <a:ln/>
-        </p:spPr>
-        <p:txBody>
-          <a:bodyPr wrap="square" lIns="0" tIns="0" rIns="0" bIns="0" rtlCol="0" anchor="t"/>
-          <a:lstStyle/>
-          <a:p>
-            <a:pPr algn="ctr" indent="0" marL="0">
-              <a:buNone/>
-            </a:pPr>
-            <a:r>
-              <a:rPr lang="en-US" sz="1600" b="1" dirty="0">
-                <a:solidFill>
-                  <a:schemeClr val="tx1"/>
-                </a:solidFill>
-                <a:latin typeface="Cambria" pitchFamily="34" charset="0"/>
-                <a:ea typeface="Cambria" pitchFamily="34" charset="-122"/>
-                <a:cs typeface="Cambria" pitchFamily="34" charset="-120"/>
-              </a:rPr>
-              <a:t>Move the horizon and the rate</a:t>
-            </a:r>
-            <a:endParaRPr lang="en-US" sz="1600" dirty="0"/>
-          </a:p>
-        </p:txBody>
-      </p:sp>
-      <p:sp>
-        <p:nvSpPr>
-          <p:cNvPr id="23" name="Flow text"/>
-          <p:cNvSpPr txBox="1"/>
-          <p:nvPr/>
-        </p:nvSpPr>
-        <p:spPr>
-          <a:xfrm>
-            <a:off x="7296729" y="3867912"/>
-            <a:ext cx="2036003" cy="1554480"/>
-          </a:xfrm>
-          <a:prstGeom prst="rect">
-            <a:avLst/>
-          </a:prstGeom>
-          <a:noFill/>
-          <a:ln/>
-        </p:spPr>
-        <p:txBody>
-          <a:bodyPr wrap="square" lIns="0" tIns="0" rIns="0" bIns="0" rtlCol="0" anchor="t"/>
-          <a:lstStyle/>
-          <a:p>
-            <a:pPr algn="ctr" indent="0" marL="0">
-              <a:buNone/>
-            </a:pPr>
-            <a:r>
-              <a:rPr lang="en-US" sz="1400" dirty="0">
-                <a:solidFill>
-                  <a:schemeClr val="tx2"/>
-                </a:solidFill>
-              </a:rPr>
-              <a:t>Vary the hurdle rate from 3 to 30 percent, switch the terminal value, lengthen the window.</a:t>
-            </a:r>
-            <a:endParaRPr lang="en-US" sz="1400" dirty="0"/>
-          </a:p>
-        </p:txBody>
-      </p:sp>
-      <p:sp>
-        <p:nvSpPr>
-          <p:cNvPr id="24" name="Number"/>
-          <p:cNvSpPr/>
-          <p:nvPr/>
-        </p:nvSpPr>
-        <p:spPr>
-          <a:xfrm>
-            <a:off x="10259294" y="2606040"/>
-            <a:ext cx="548640" cy="548640"/>
-          </a:xfrm>
-          <a:prstGeom prst="ellipse">
-            <a:avLst/>
-          </a:prstGeom>
-          <a:solidFill>
-            <a:schemeClr val="accent1"/>
-          </a:solidFill>
-          <a:ln w="6350">
-            <a:solidFill>
-              <a:schemeClr val="accent1"/>
-            </a:solidFill>
-            <a:prstDash val="solid"/>
-          </a:ln>
-        </p:spPr>
-      </p:sp>
-      <p:sp>
-        <p:nvSpPr>
-          <p:cNvPr id="25" name="Text 21"/>
-          <p:cNvSpPr txBox="1"/>
-          <p:nvPr/>
-        </p:nvSpPr>
-        <p:spPr>
-          <a:xfrm>
-            <a:off x="10259294" y="2606040"/>
-            <a:ext cx="548640" cy="548640"/>
-          </a:xfrm>
-          <a:prstGeom prst="rect">
-            <a:avLst/>
-          </a:prstGeom>
-          <a:noFill/>
-          <a:ln/>
-        </p:spPr>
-        <p:txBody>
-          <a:bodyPr wrap="square" lIns="0" tIns="0" rIns="0" bIns="0" rtlCol="0" anchor="ctr"/>
-          <a:lstStyle/>
-          <a:p>
-            <a:pPr algn="ctr" indent="0" marL="0">
-              <a:buNone/>
-            </a:pPr>
-            <a:r>
-              <a:rPr lang="en-US" sz="1600" b="1" dirty="0">
-                <a:solidFill>
-                  <a:schemeClr val="bg1"/>
-                </a:solidFill>
-                <a:latin typeface="Calibri" pitchFamily="34" charset="0"/>
-                <a:ea typeface="Calibri" pitchFamily="34" charset="-122"/>
-                <a:cs typeface="Calibri" pitchFamily="34" charset="-120"/>
-              </a:rPr>
-              <a:t>5</a:t>
-            </a:r>
-            <a:endParaRPr lang="en-US" sz="1600" dirty="0"/>
-          </a:p>
-        </p:txBody>
-      </p:sp>
-      <p:sp>
-        <p:nvSpPr>
-          <p:cNvPr id="26" name="Flow head"/>
-          <p:cNvSpPr txBox="1"/>
-          <p:nvPr/>
-        </p:nvSpPr>
-        <p:spPr>
-          <a:xfrm>
-            <a:off x="9497324" y="3291840"/>
-            <a:ext cx="2072579" cy="548640"/>
-          </a:xfrm>
-          <a:prstGeom prst="rect">
-            <a:avLst/>
-          </a:prstGeom>
-          <a:noFill/>
-          <a:ln/>
-        </p:spPr>
-        <p:txBody>
-          <a:bodyPr wrap="square" lIns="0" tIns="0" rIns="0" bIns="0" rtlCol="0" anchor="t"/>
-          <a:lstStyle/>
-          <a:p>
-            <a:pPr algn="ctr" indent="0" marL="0">
-              <a:buNone/>
-            </a:pPr>
-            <a:r>
-              <a:rPr lang="en-US" sz="1600" b="1" dirty="0">
-                <a:solidFill>
-                  <a:schemeClr val="tx1"/>
-                </a:solidFill>
-                <a:latin typeface="Cambria" pitchFamily="34" charset="0"/>
-                <a:ea typeface="Cambria" pitchFamily="34" charset="-122"/>
-                <a:cs typeface="Cambria" pitchFamily="34" charset="-120"/>
-              </a:rPr>
-              <a:t>Stress</a:t>
-            </a:r>
-            <a:endParaRPr lang="en-US" sz="1600" dirty="0"/>
-          </a:p>
-        </p:txBody>
-      </p:sp>
-      <p:sp>
-        <p:nvSpPr>
-          <p:cNvPr id="27" name="Flow text"/>
-          <p:cNvSpPr txBox="1"/>
-          <p:nvPr/>
-        </p:nvSpPr>
-        <p:spPr>
-          <a:xfrm>
-            <a:off x="9515612" y="3867912"/>
-            <a:ext cx="2036003" cy="1554480"/>
-          </a:xfrm>
-          <a:prstGeom prst="rect">
-            <a:avLst/>
-          </a:prstGeom>
-          <a:noFill/>
-          <a:ln/>
-        </p:spPr>
-        <p:txBody>
-          <a:bodyPr wrap="square" lIns="0" tIns="0" rIns="0" bIns="0" rtlCol="0" anchor="t"/>
-          <a:lstStyle/>
-          <a:p>
-            <a:pPr algn="ctr" indent="0" marL="0">
-              <a:buNone/>
-            </a:pPr>
-            <a:r>
-              <a:rPr lang="en-US" sz="1400" dirty="0">
-                <a:solidFill>
-                  <a:schemeClr val="tx2"/>
-                </a:solidFill>
-              </a:rPr>
-              <a:t>Make each round a point short; run Step 3's schedule and the war-chest rule side by side.</a:t>
-            </a:r>
-            <a:endParaRPr lang="en-US" sz="1400" dirty="0"/>
-          </a:p>
-        </p:txBody>
-      </p:sp>
-      <p:sp>
-        <p:nvSpPr>
-          <p:cNvPr id="28" name="Deliverable card"/>
-          <p:cNvSpPr/>
-          <p:nvPr/>
-        </p:nvSpPr>
-        <p:spPr>
-          <a:xfrm>
-            <a:off x="548640" y="5486400"/>
-            <a:ext cx="11094415" cy="685800"/>
+            <a:off x="548640" y="1691640"/>
+            <a:ext cx="3515258" cy="2103120"/>
           </a:xfrm>
           <a:prstGeom prst="roundRect">
             <a:avLst>
-              <a:gd name="adj" fmla="val 10667"/>
+              <a:gd name="adj" fmla="val 3478"/>
             </a:avLst>
           </a:prstGeom>
           <a:solidFill>
@@ -12276,14 +11592,14 @@
       </p:sp>
       <p:sp>
         <p:nvSpPr>
-          <p:cNvPr id="29" name="Deliverable"/>
+          <p:cNvPr id="6" name="Card label"/>
           <p:cNvSpPr txBox="1"/>
           <p:nvPr/>
         </p:nvSpPr>
         <p:spPr>
           <a:xfrm>
-            <a:off x="777240" y="5559552"/>
-            <a:ext cx="10637215" cy="539496"/>
+            <a:off x="731520" y="1819656"/>
+            <a:ext cx="3149498" cy="310896"/>
           </a:xfrm>
           <a:prstGeom prst="rect">
             <a:avLst/>
@@ -12299,22 +11615,779 @@
               <a:buNone/>
             </a:pPr>
             <a:r>
-              <a:rPr lang="en-US" sz="1400" b="1" dirty="0">
+              <a:rPr lang="en-US" sz="1300" b="1" dirty="0">
+                <a:solidFill>
+                  <a:schemeClr val="accent1"/>
+                </a:solidFill>
+              </a:rPr>
+              <a:t>The decision</a:t>
+            </a:r>
+            <a:endParaRPr lang="en-US" sz="1300" dirty="0"/>
+          </a:p>
+        </p:txBody>
+      </p:sp>
+      <p:sp>
+        <p:nvSpPr>
+          <p:cNvPr id="7" name="Card head"/>
+          <p:cNvSpPr txBox="1"/>
+          <p:nvPr/>
+        </p:nvSpPr>
+        <p:spPr>
+          <a:xfrm>
+            <a:off x="731520" y="2148840"/>
+            <a:ext cx="3149498" cy="576072"/>
+          </a:xfrm>
+          <a:prstGeom prst="rect">
+            <a:avLst/>
+          </a:prstGeom>
+          <a:noFill/>
+          <a:ln/>
+        </p:spPr>
+        <p:txBody>
+          <a:bodyPr wrap="square" lIns="0" tIns="0" rIns="0" bIns="0" rtlCol="0" anchor="t"/>
+          <a:lstStyle/>
+          <a:p>
+            <a:pPr indent="0" marL="0">
+              <a:buNone/>
+            </a:pPr>
+            <a:r>
+              <a:rPr lang="en-US" sz="1600" b="1" dirty="0">
                 <a:solidFill>
                   <a:schemeClr val="tx1"/>
                 </a:solidFill>
-              </a:rPr>
-              <a:t>Deliverable:</a:t>
-            </a:r>
-            <a:r>
-              <a:rPr lang="en-US" sz="1400" dirty="0">
+                <a:latin typeface="Cambria" pitchFamily="34" charset="0"/>
+                <a:ea typeface="Cambria" pitchFamily="34" charset="-122"/>
+                <a:cs typeface="Cambria" pitchFamily="34" charset="-120"/>
+              </a:rPr>
+              <a:t>Clearance prices, week by week</a:t>
+            </a:r>
+            <a:endParaRPr lang="en-US" sz="1600" dirty="0"/>
+          </a:p>
+        </p:txBody>
+      </p:sp>
+      <p:sp>
+        <p:nvSpPr>
+          <p:cNvPr id="8" name="Card text"/>
+          <p:cNvSpPr txBox="1"/>
+          <p:nvPr/>
+        </p:nvSpPr>
+        <p:spPr>
+          <a:xfrm>
+            <a:off x="731520" y="2798064"/>
+            <a:ext cx="3149498" cy="868680"/>
+          </a:xfrm>
+          <a:prstGeom prst="rect">
+            <a:avLst/>
+          </a:prstGeom>
+          <a:noFill/>
+          <a:ln/>
+        </p:spPr>
+        <p:txBody>
+          <a:bodyPr wrap="square" lIns="0" tIns="0" rIns="0" bIns="0" rtlCol="0" anchor="t"/>
+          <a:lstStyle/>
+          <a:p>
+            <a:pPr indent="0" marL="0">
+              <a:buNone/>
+            </a:pPr>
+            <a:r>
+              <a:rPr lang="en-US" sz="1300" dirty="0">
+                <a:solidFill>
+                  <a:schemeClr val="tx2"/>
+                </a:solidFill>
+              </a:rPr>
+              <a:t>The price of each cluster of unsold articles in each country, for about two months after each season.</a:t>
+            </a:r>
+            <a:endParaRPr lang="en-US" sz="1300" dirty="0"/>
+          </a:p>
+        </p:txBody>
+      </p:sp>
+      <p:sp>
+        <p:nvSpPr>
+          <p:cNvPr id="9" name="Card"/>
+          <p:cNvSpPr/>
+          <p:nvPr/>
+        </p:nvSpPr>
+        <p:spPr>
+          <a:xfrm>
+            <a:off x="4338218" y="1691640"/>
+            <a:ext cx="3515258" cy="2103120"/>
+          </a:xfrm>
+          <a:prstGeom prst="roundRect">
+            <a:avLst>
+              <a:gd name="adj" fmla="val 3478"/>
+            </a:avLst>
+          </a:prstGeom>
+          <a:solidFill>
+            <a:schemeClr val="bg2"/>
+          </a:solidFill>
+          <a:ln w="9525">
+            <a:solidFill>
+              <a:srgbClr val="C4CBD8"/>
+            </a:solidFill>
+            <a:prstDash val="solid"/>
+          </a:ln>
+        </p:spPr>
+      </p:sp>
+      <p:sp>
+        <p:nvSpPr>
+          <p:cNvPr id="10" name="Card label"/>
+          <p:cNvSpPr txBox="1"/>
+          <p:nvPr/>
+        </p:nvSpPr>
+        <p:spPr>
+          <a:xfrm>
+            <a:off x="4521098" y="1819656"/>
+            <a:ext cx="3149498" cy="310896"/>
+          </a:xfrm>
+          <a:prstGeom prst="rect">
+            <a:avLst/>
+          </a:prstGeom>
+          <a:noFill/>
+          <a:ln/>
+        </p:spPr>
+        <p:txBody>
+          <a:bodyPr wrap="square" lIns="0" tIns="0" rIns="0" bIns="0" rtlCol="0" anchor="ctr"/>
+          <a:lstStyle/>
+          <a:p>
+            <a:pPr indent="0" marL="0">
+              <a:buNone/>
+            </a:pPr>
+            <a:r>
+              <a:rPr lang="en-US" sz="1300" b="1" dirty="0">
+                <a:solidFill>
+                  <a:schemeClr val="accent1"/>
+                </a:solidFill>
+              </a:rPr>
+              <a:t>The method</a:t>
+            </a:r>
+            <a:endParaRPr lang="en-US" sz="1300" dirty="0"/>
+          </a:p>
+        </p:txBody>
+      </p:sp>
+      <p:sp>
+        <p:nvSpPr>
+          <p:cNvPr id="11" name="Card head"/>
+          <p:cNvSpPr txBox="1"/>
+          <p:nvPr/>
+        </p:nvSpPr>
+        <p:spPr>
+          <a:xfrm>
+            <a:off x="4521098" y="2148840"/>
+            <a:ext cx="3149498" cy="576072"/>
+          </a:xfrm>
+          <a:prstGeom prst="rect">
+            <a:avLst/>
+          </a:prstGeom>
+          <a:noFill/>
+          <a:ln/>
+        </p:spPr>
+        <p:txBody>
+          <a:bodyPr wrap="square" lIns="0" tIns="0" rIns="0" bIns="0" rtlCol="0" anchor="t"/>
+          <a:lstStyle/>
+          <a:p>
+            <a:pPr indent="0" marL="0">
+              <a:buNone/>
+            </a:pPr>
+            <a:r>
+              <a:rPr lang="en-US" sz="1600" b="1" dirty="0">
                 <a:solidFill>
                   <a:schemeClr val="tx1"/>
                 </a:solidFill>
-              </a:rPr>
-              <a:t> a one-page note to the board recommending a payout rule, with its value, the war chest by year, the price of the end condition, and the plan's behavior when the rounds fall short. About 75 minutes.</a:t>
-            </a:r>
-            <a:endParaRPr lang="en-US" sz="1400" dirty="0"/>
+                <a:latin typeface="Cambria" pitchFamily="34" charset="0"/>
+                <a:ea typeface="Cambria" pitchFamily="34" charset="-122"/>
+                <a:cs typeface="Cambria" pitchFamily="34" charset="-120"/>
+              </a:rPr>
+              <a:t>Plan to the end, carry out one week</a:t>
+            </a:r>
+            <a:endParaRPr lang="en-US" sz="1600" dirty="0"/>
+          </a:p>
+        </p:txBody>
+      </p:sp>
+      <p:sp>
+        <p:nvSpPr>
+          <p:cNvPr id="12" name="Card text"/>
+          <p:cNvSpPr txBox="1"/>
+          <p:nvPr/>
+        </p:nvSpPr>
+        <p:spPr>
+          <a:xfrm>
+            <a:off x="4521098" y="2798064"/>
+            <a:ext cx="3149498" cy="868680"/>
+          </a:xfrm>
+          <a:prstGeom prst="rect">
+            <a:avLst/>
+          </a:prstGeom>
+          <a:noFill/>
+          <a:ln/>
+        </p:spPr>
+        <p:txBody>
+          <a:bodyPr wrap="square" lIns="0" tIns="0" rIns="0" bIns="0" rtlCol="0" anchor="t"/>
+          <a:lstStyle/>
+          <a:p>
+            <a:pPr indent="0" marL="0">
+              <a:buNone/>
+            </a:pPr>
+            <a:r>
+              <a:rPr lang="en-US" sz="1300" dirty="0">
+                <a:solidFill>
+                  <a:schemeClr val="tx2"/>
+                </a:solidFill>
+              </a:rPr>
+              <a:t>A forecast feeding a mixed-integer program over all remaining weeks, with liquidation at the end, re-solved weekly.</a:t>
+            </a:r>
+            <a:endParaRPr lang="en-US" sz="1300" dirty="0"/>
+          </a:p>
+        </p:txBody>
+      </p:sp>
+      <p:sp>
+        <p:nvSpPr>
+          <p:cNvPr id="13" name="Card"/>
+          <p:cNvSpPr/>
+          <p:nvPr/>
+        </p:nvSpPr>
+        <p:spPr>
+          <a:xfrm>
+            <a:off x="8127797" y="1691640"/>
+            <a:ext cx="3515258" cy="2103120"/>
+          </a:xfrm>
+          <a:prstGeom prst="roundRect">
+            <a:avLst>
+              <a:gd name="adj" fmla="val 3478"/>
+            </a:avLst>
+          </a:prstGeom>
+          <a:solidFill>
+            <a:schemeClr val="tx1"/>
+          </a:solidFill>
+          <a:ln w="9525">
+            <a:solidFill>
+              <a:srgbClr val="0F1E3D"/>
+            </a:solidFill>
+            <a:prstDash val="solid"/>
+          </a:ln>
+        </p:spPr>
+      </p:sp>
+      <p:sp>
+        <p:nvSpPr>
+          <p:cNvPr id="14" name="Card label"/>
+          <p:cNvSpPr txBox="1"/>
+          <p:nvPr/>
+        </p:nvSpPr>
+        <p:spPr>
+          <a:xfrm>
+            <a:off x="8310677" y="1819656"/>
+            <a:ext cx="3149498" cy="310896"/>
+          </a:xfrm>
+          <a:prstGeom prst="rect">
+            <a:avLst/>
+          </a:prstGeom>
+          <a:noFill/>
+          <a:ln/>
+        </p:spPr>
+        <p:txBody>
+          <a:bodyPr wrap="square" lIns="0" tIns="0" rIns="0" bIns="0" rtlCol="0" anchor="ctr"/>
+          <a:lstStyle/>
+          <a:p>
+            <a:pPr indent="0" marL="0">
+              <a:buNone/>
+            </a:pPr>
+            <a:r>
+              <a:rPr lang="en-US" sz="1300" b="1" dirty="0">
+                <a:solidFill>
+                  <a:schemeClr val="accent1"/>
+                </a:solidFill>
+              </a:rPr>
+              <a:t>The result</a:t>
+            </a:r>
+            <a:endParaRPr lang="en-US" sz="1300" dirty="0"/>
+          </a:p>
+        </p:txBody>
+      </p:sp>
+      <p:sp>
+        <p:nvSpPr>
+          <p:cNvPr id="15" name="Card head"/>
+          <p:cNvSpPr txBox="1"/>
+          <p:nvPr/>
+        </p:nvSpPr>
+        <p:spPr>
+          <a:xfrm>
+            <a:off x="8310677" y="2148840"/>
+            <a:ext cx="3149498" cy="576072"/>
+          </a:xfrm>
+          <a:prstGeom prst="rect">
+            <a:avLst/>
+          </a:prstGeom>
+          <a:noFill/>
+          <a:ln/>
+        </p:spPr>
+        <p:txBody>
+          <a:bodyPr wrap="square" lIns="0" tIns="0" rIns="0" bIns="0" rtlCol="0" anchor="t"/>
+          <a:lstStyle/>
+          <a:p>
+            <a:pPr indent="0" marL="0">
+              <a:buNone/>
+            </a:pPr>
+            <a:r>
+              <a:rPr lang="en-US" sz="1600" b="1" dirty="0">
+                <a:solidFill>
+                  <a:schemeClr val="bg1"/>
+                </a:solidFill>
+                <a:latin typeface="Cambria" pitchFamily="34" charset="0"/>
+                <a:ea typeface="Cambria" pitchFamily="34" charset="-122"/>
+                <a:cs typeface="Cambria" pitchFamily="34" charset="-120"/>
+              </a:rPr>
+              <a:t>About 6% more clearance revenue</a:t>
+            </a:r>
+            <a:endParaRPr lang="en-US" sz="1600" dirty="0"/>
+          </a:p>
+        </p:txBody>
+      </p:sp>
+      <p:sp>
+        <p:nvSpPr>
+          <p:cNvPr id="16" name="Card text"/>
+          <p:cNvSpPr txBox="1"/>
+          <p:nvPr/>
+        </p:nvSpPr>
+        <p:spPr>
+          <a:xfrm>
+            <a:off x="8310677" y="2798064"/>
+            <a:ext cx="3149498" cy="868680"/>
+          </a:xfrm>
+          <a:prstGeom prst="rect">
+            <a:avLst/>
+          </a:prstGeom>
+          <a:noFill/>
+          <a:ln/>
+        </p:spPr>
+        <p:txBody>
+          <a:bodyPr wrap="square" lIns="0" tIns="0" rIns="0" bIns="0" rtlCol="0" anchor="t"/>
+          <a:lstStyle/>
+          <a:p>
+            <a:pPr indent="0" marL="0">
+              <a:buNone/>
+            </a:pPr>
+            <a:r>
+              <a:rPr lang="en-US" sz="1300" dirty="0">
+                <a:solidFill>
+                  <a:schemeClr val="bg2"/>
+                </a:solidFill>
+              </a:rPr>
+              <a:t>In a controlled 2009 pilot in Belgium and Ireland; the model became Zara's standard markdown tool.</a:t>
+            </a:r>
+            <a:endParaRPr lang="en-US" sz="1300" dirty="0"/>
+          </a:p>
+        </p:txBody>
+      </p:sp>
+      <p:sp>
+        <p:nvSpPr>
+          <p:cNvPr id="17" name="Card"/>
+          <p:cNvSpPr/>
+          <p:nvPr/>
+        </p:nvSpPr>
+        <p:spPr>
+          <a:xfrm>
+            <a:off x="548640" y="4069080"/>
+            <a:ext cx="3515258" cy="2103120"/>
+          </a:xfrm>
+          <a:prstGeom prst="roundRect">
+            <a:avLst>
+              <a:gd name="adj" fmla="val 3478"/>
+            </a:avLst>
+          </a:prstGeom>
+          <a:solidFill>
+            <a:schemeClr val="bg2"/>
+          </a:solidFill>
+          <a:ln w="9525">
+            <a:solidFill>
+              <a:srgbClr val="C4CBD8"/>
+            </a:solidFill>
+            <a:prstDash val="solid"/>
+          </a:ln>
+        </p:spPr>
+      </p:sp>
+      <p:sp>
+        <p:nvSpPr>
+          <p:cNvPr id="18" name="Card label"/>
+          <p:cNvSpPr txBox="1"/>
+          <p:nvPr/>
+        </p:nvSpPr>
+        <p:spPr>
+          <a:xfrm>
+            <a:off x="731520" y="4197096"/>
+            <a:ext cx="3149498" cy="310896"/>
+          </a:xfrm>
+          <a:prstGeom prst="rect">
+            <a:avLst/>
+          </a:prstGeom>
+          <a:noFill/>
+          <a:ln/>
+        </p:spPr>
+        <p:txBody>
+          <a:bodyPr wrap="square" lIns="0" tIns="0" rIns="0" bIns="0" rtlCol="0" anchor="ctr"/>
+          <a:lstStyle/>
+          <a:p>
+            <a:pPr indent="0" marL="0">
+              <a:buNone/>
+            </a:pPr>
+            <a:r>
+              <a:rPr lang="en-US" sz="1300" b="1" dirty="0">
+                <a:solidFill>
+                  <a:schemeClr val="accent1"/>
+                </a:solidFill>
+              </a:rPr>
+              <a:t>Making it work</a:t>
+            </a:r>
+            <a:endParaRPr lang="en-US" sz="1300" dirty="0"/>
+          </a:p>
+        </p:txBody>
+      </p:sp>
+      <p:sp>
+        <p:nvSpPr>
+          <p:cNvPr id="19" name="Card head"/>
+          <p:cNvSpPr txBox="1"/>
+          <p:nvPr/>
+        </p:nvSpPr>
+        <p:spPr>
+          <a:xfrm>
+            <a:off x="731520" y="4526280"/>
+            <a:ext cx="3149498" cy="576072"/>
+          </a:xfrm>
+          <a:prstGeom prst="rect">
+            <a:avLst/>
+          </a:prstGeom>
+          <a:noFill/>
+          <a:ln/>
+        </p:spPr>
+        <p:txBody>
+          <a:bodyPr wrap="square" lIns="0" tIns="0" rIns="0" bIns="0" rtlCol="0" anchor="t"/>
+          <a:lstStyle/>
+          <a:p>
+            <a:pPr indent="0" marL="0">
+              <a:buNone/>
+            </a:pPr>
+            <a:r>
+              <a:rPr lang="en-US" sz="1600" b="1" dirty="0">
+                <a:solidFill>
+                  <a:schemeClr val="tx1"/>
+                </a:solidFill>
+                <a:latin typeface="Cambria" pitchFamily="34" charset="0"/>
+                <a:ea typeface="Cambria" pitchFamily="34" charset="-122"/>
+                <a:cs typeface="Cambria" pitchFamily="34" charset="-120"/>
+              </a:rPr>
+              <a:t>Trust is earned week by week</a:t>
+            </a:r>
+            <a:endParaRPr lang="en-US" sz="1600" dirty="0"/>
+          </a:p>
+        </p:txBody>
+      </p:sp>
+      <p:sp>
+        <p:nvSpPr>
+          <p:cNvPr id="20" name="Card text"/>
+          <p:cNvSpPr txBox="1"/>
+          <p:nvPr/>
+        </p:nvSpPr>
+        <p:spPr>
+          <a:xfrm>
+            <a:off x="731520" y="5175504"/>
+            <a:ext cx="3149498" cy="868680"/>
+          </a:xfrm>
+          <a:prstGeom prst="rect">
+            <a:avLst/>
+          </a:prstGeom>
+          <a:noFill/>
+          <a:ln/>
+        </p:spPr>
+        <p:txBody>
+          <a:bodyPr wrap="square" lIns="0" tIns="0" rIns="0" bIns="0" rtlCol="0" anchor="t"/>
+          <a:lstStyle/>
+          <a:p>
+            <a:pPr indent="0" marL="0">
+              <a:buNone/>
+            </a:pPr>
+            <a:r>
+              <a:rPr lang="en-US" sz="1300" dirty="0">
+                <a:solidFill>
+                  <a:schemeClr val="tx2"/>
+                </a:solidFill>
+              </a:rPr>
+              <a:t>After a forecast miss, managers overrode the model on one group; elsewhere they followed it closely.</a:t>
+            </a:r>
+            <a:endParaRPr lang="en-US" sz="1300" dirty="0"/>
+          </a:p>
+        </p:txBody>
+      </p:sp>
+      <p:sp>
+        <p:nvSpPr>
+          <p:cNvPr id="21" name="Card"/>
+          <p:cNvSpPr/>
+          <p:nvPr/>
+        </p:nvSpPr>
+        <p:spPr>
+          <a:xfrm>
+            <a:off x="4338218" y="4069080"/>
+            <a:ext cx="3515258" cy="2103120"/>
+          </a:xfrm>
+          <a:prstGeom prst="roundRect">
+            <a:avLst>
+              <a:gd name="adj" fmla="val 3478"/>
+            </a:avLst>
+          </a:prstGeom>
+          <a:solidFill>
+            <a:schemeClr val="bg2"/>
+          </a:solidFill>
+          <a:ln w="9525">
+            <a:solidFill>
+              <a:srgbClr val="C4CBD8"/>
+            </a:solidFill>
+            <a:prstDash val="solid"/>
+          </a:ln>
+        </p:spPr>
+      </p:sp>
+      <p:sp>
+        <p:nvSpPr>
+          <p:cNvPr id="22" name="Card label"/>
+          <p:cNvSpPr txBox="1"/>
+          <p:nvPr/>
+        </p:nvSpPr>
+        <p:spPr>
+          <a:xfrm>
+            <a:off x="4521098" y="4197096"/>
+            <a:ext cx="3149498" cy="310896"/>
+          </a:xfrm>
+          <a:prstGeom prst="rect">
+            <a:avLst/>
+          </a:prstGeom>
+          <a:noFill/>
+          <a:ln/>
+        </p:spPr>
+        <p:txBody>
+          <a:bodyPr wrap="square" lIns="0" tIns="0" rIns="0" bIns="0" rtlCol="0" anchor="ctr"/>
+          <a:lstStyle/>
+          <a:p>
+            <a:pPr indent="0" marL="0">
+              <a:buNone/>
+            </a:pPr>
+            <a:r>
+              <a:rPr lang="en-US" sz="1300" b="1" dirty="0">
+                <a:solidFill>
+                  <a:schemeClr val="accent1"/>
+                </a:solidFill>
+              </a:rPr>
+              <a:t>What Meridian takes</a:t>
+            </a:r>
+            <a:endParaRPr lang="en-US" sz="1300" dirty="0"/>
+          </a:p>
+        </p:txBody>
+      </p:sp>
+      <p:sp>
+        <p:nvSpPr>
+          <p:cNvPr id="23" name="Card head"/>
+          <p:cNvSpPr txBox="1"/>
+          <p:nvPr/>
+        </p:nvSpPr>
+        <p:spPr>
+          <a:xfrm>
+            <a:off x="4521098" y="4526280"/>
+            <a:ext cx="3149498" cy="576072"/>
+          </a:xfrm>
+          <a:prstGeom prst="rect">
+            <a:avLst/>
+          </a:prstGeom>
+          <a:noFill/>
+          <a:ln/>
+        </p:spPr>
+        <p:txBody>
+          <a:bodyPr wrap="square" lIns="0" tIns="0" rIns="0" bIns="0" rtlCol="0" anchor="t"/>
+          <a:lstStyle/>
+          <a:p>
+            <a:pPr indent="0" marL="0">
+              <a:buNone/>
+            </a:pPr>
+            <a:r>
+              <a:rPr lang="en-US" sz="1600" b="1" dirty="0">
+                <a:solidFill>
+                  <a:schemeClr val="tx1"/>
+                </a:solidFill>
+                <a:latin typeface="Cambria" pitchFamily="34" charset="0"/>
+                <a:ea typeface="Cambria" pitchFamily="34" charset="-122"/>
+                <a:cs typeface="Cambria" pitchFamily="34" charset="-120"/>
+              </a:rPr>
+              <a:t>The war-chest rule</a:t>
+            </a:r>
+            <a:endParaRPr lang="en-US" sz="1600" dirty="0"/>
+          </a:p>
+        </p:txBody>
+      </p:sp>
+      <p:sp>
+        <p:nvSpPr>
+          <p:cNvPr id="24" name="Card text"/>
+          <p:cNvSpPr txBox="1"/>
+          <p:nvPr/>
+        </p:nvSpPr>
+        <p:spPr>
+          <a:xfrm>
+            <a:off x="4521098" y="5175504"/>
+            <a:ext cx="3149498" cy="868680"/>
+          </a:xfrm>
+          <a:prstGeom prst="rect">
+            <a:avLst/>
+          </a:prstGeom>
+          <a:noFill/>
+          <a:ln/>
+        </p:spPr>
+        <p:txBody>
+          <a:bodyPr wrap="square" lIns="0" tIns="0" rIns="0" bIns="0" rtlCol="0" anchor="t"/>
+          <a:lstStyle/>
+          <a:p>
+            <a:pPr indent="0" marL="0">
+              <a:buNone/>
+            </a:pPr>
+            <a:r>
+              <a:rPr lang="en-US" sz="1300" dirty="0">
+                <a:solidFill>
+                  <a:schemeClr val="tx2"/>
+                </a:solidFill>
+              </a:rPr>
+              <a:t>Plan to the end, carry out the first step, and plan again from the measured state: Worked Example 5.1.</a:t>
+            </a:r>
+            <a:endParaRPr lang="en-US" sz="1300" dirty="0"/>
+          </a:p>
+        </p:txBody>
+      </p:sp>
+      <p:sp>
+        <p:nvSpPr>
+          <p:cNvPr id="25" name="Card"/>
+          <p:cNvSpPr/>
+          <p:nvPr/>
+        </p:nvSpPr>
+        <p:spPr>
+          <a:xfrm>
+            <a:off x="8127797" y="4069080"/>
+            <a:ext cx="3515258" cy="2103120"/>
+          </a:xfrm>
+          <a:prstGeom prst="roundRect">
+            <a:avLst>
+              <a:gd name="adj" fmla="val 3478"/>
+            </a:avLst>
+          </a:prstGeom>
+          <a:solidFill>
+            <a:schemeClr val="bg2"/>
+          </a:solidFill>
+          <a:ln w="9525">
+            <a:solidFill>
+              <a:srgbClr val="C4CBD8"/>
+            </a:solidFill>
+            <a:prstDash val="solid"/>
+          </a:ln>
+        </p:spPr>
+      </p:sp>
+      <p:sp>
+        <p:nvSpPr>
+          <p:cNvPr id="26" name="Card label"/>
+          <p:cNvSpPr txBox="1"/>
+          <p:nvPr/>
+        </p:nvSpPr>
+        <p:spPr>
+          <a:xfrm>
+            <a:off x="8310677" y="4197096"/>
+            <a:ext cx="3149498" cy="310896"/>
+          </a:xfrm>
+          <a:prstGeom prst="rect">
+            <a:avLst/>
+          </a:prstGeom>
+          <a:noFill/>
+          <a:ln/>
+        </p:spPr>
+        <p:txBody>
+          <a:bodyPr wrap="square" lIns="0" tIns="0" rIns="0" bIns="0" rtlCol="0" anchor="ctr"/>
+          <a:lstStyle/>
+          <a:p>
+            <a:pPr indent="0" marL="0">
+              <a:buNone/>
+            </a:pPr>
+            <a:r>
+              <a:rPr lang="en-US" sz="1300" b="1" dirty="0">
+                <a:solidFill>
+                  <a:schemeClr val="accent1"/>
+                </a:solidFill>
+              </a:rPr>
+              <a:t>For the board</a:t>
+            </a:r>
+            <a:endParaRPr lang="en-US" sz="1300" dirty="0"/>
+          </a:p>
+        </p:txBody>
+      </p:sp>
+      <p:sp>
+        <p:nvSpPr>
+          <p:cNvPr id="27" name="Card head"/>
+          <p:cNvSpPr txBox="1"/>
+          <p:nvPr/>
+        </p:nvSpPr>
+        <p:spPr>
+          <a:xfrm>
+            <a:off x="8310677" y="4526280"/>
+            <a:ext cx="3149498" cy="576072"/>
+          </a:xfrm>
+          <a:prstGeom prst="rect">
+            <a:avLst/>
+          </a:prstGeom>
+          <a:noFill/>
+          <a:ln/>
+        </p:spPr>
+        <p:txBody>
+          <a:bodyPr wrap="square" lIns="0" tIns="0" rIns="0" bIns="0" rtlCol="0" anchor="t"/>
+          <a:lstStyle/>
+          <a:p>
+            <a:pPr indent="0" marL="0">
+              <a:buNone/>
+            </a:pPr>
+            <a:r>
+              <a:rPr lang="en-US" sz="1600" b="1" dirty="0">
+                <a:solidFill>
+                  <a:schemeClr val="tx1"/>
+                </a:solidFill>
+                <a:latin typeface="Cambria" pitchFamily="34" charset="0"/>
+                <a:ea typeface="Cambria" pitchFamily="34" charset="-122"/>
+                <a:cs typeface="Cambria" pitchFamily="34" charset="-120"/>
+              </a:rPr>
+              <a:t>What is the control?</a:t>
+            </a:r>
+            <a:endParaRPr lang="en-US" sz="1600" dirty="0"/>
+          </a:p>
+        </p:txBody>
+      </p:sp>
+      <p:sp>
+        <p:nvSpPr>
+          <p:cNvPr id="28" name="Card text"/>
+          <p:cNvSpPr txBox="1"/>
+          <p:nvPr/>
+        </p:nvSpPr>
+        <p:spPr>
+          <a:xfrm>
+            <a:off x="8310677" y="5175504"/>
+            <a:ext cx="3149498" cy="868680"/>
+          </a:xfrm>
+          <a:prstGeom prst="rect">
+            <a:avLst/>
+          </a:prstGeom>
+          <a:noFill/>
+          <a:ln/>
+        </p:spPr>
+        <p:txBody>
+          <a:bodyPr wrap="square" lIns="0" tIns="0" rIns="0" bIns="0" rtlCol="0" anchor="t"/>
+          <a:lstStyle/>
+          <a:p>
+            <a:pPr indent="0" marL="0">
+              <a:buNone/>
+            </a:pPr>
+            <a:r>
+              <a:rPr lang="en-US" sz="1300" dirty="0">
+                <a:solidFill>
+                  <a:schemeClr val="tx2"/>
+                </a:solidFill>
+              </a:rPr>
+              <a:t>Before we adopt a new decision method, how will we compare it with the current one?</a:t>
+            </a:r>
+            <a:endParaRPr lang="en-US" sz="1300" dirty="0"/>
           </a:p>
         </p:txBody>
       </p:sp>
@@ -12420,7 +12493,7 @@
                   <a:schemeClr val="accent1"/>
                 </a:solidFill>
               </a:rPr>
-              <a:t>KEY TAKEAWAYS</a:t>
+              <a:t>AXIOM LAB 2.5 · MODULE AXIOM-05</a:t>
             </a:r>
             <a:endParaRPr lang="en-US" sz="1200" dirty="0"/>
           </a:p>
@@ -12461,22 +12534,105 @@
                 <a:ea typeface="Cambria" pitchFamily="34" charset="-122"/>
                 <a:cs typeface="Cambria" pitchFamily="34" charset="-120"/>
               </a:rPr>
-              <a:t>What to carry forward</a:t>
+              <a:t>Planning over time, in AXIOM</a:t>
             </a:r>
             <a:endParaRPr lang="en-US" sz="3200" dirty="0"/>
           </a:p>
         </p:txBody>
       </p:sp>
-      <p:sp>
-        <p:nvSpPr>
-          <p:cNvPr id="5" name="Number"/>
+      <p:pic>
+        <p:nvPicPr>
+          <p:cNvPr id="5" name="AXIOM logo" descr="AXIOM">    </p:cNvPr>
+          <p:cNvPicPr>
+            <a:picLocks noChangeAspect="1"/>
+          </p:cNvPicPr>
+          <p:nvPr/>
+        </p:nvPicPr>
+        <p:blipFill>
+          <a:blip r:embed="rId1"/>
+          <a:stretch>
+            <a:fillRect/>
+          </a:stretch>
+        </p:blipFill>
+        <p:spPr>
+          <a:xfrm>
+            <a:off x="9539935" y="310896"/>
+            <a:ext cx="2103120" cy="420624"/>
+          </a:xfrm>
+          <a:prstGeom prst="rect">
+            <a:avLst/>
+          </a:prstGeom>
+        </p:spPr>
+      </p:pic>
+      <p:sp>
+        <p:nvSpPr>
+          <p:cNvPr id="6" name="Situation"/>
+          <p:cNvSpPr txBox="1"/>
+          <p:nvPr/>
+        </p:nvSpPr>
+        <p:spPr>
+          <a:xfrm>
+            <a:off x="548640" y="1645920"/>
+            <a:ext cx="11094415" cy="777240"/>
+          </a:xfrm>
+          <a:prstGeom prst="rect">
+            <a:avLst/>
+          </a:prstGeom>
+          <a:noFill/>
+          <a:ln/>
+        </p:spPr>
+        <p:txBody>
+          <a:bodyPr wrap="square" lIns="0" tIns="0" rIns="0" bIns="0" rtlCol="0" anchor="t"/>
+          <a:lstStyle/>
+          <a:p>
+            <a:pPr indent="0" marL="0">
+              <a:buNone/>
+            </a:pPr>
+            <a:r>
+              <a:rPr lang="en-US" sz="1500" dirty="0">
+                <a:solidFill>
+                  <a:schemeClr val="tx1"/>
+                </a:solidFill>
+              </a:rPr>
+              <a:t>Meridian's board has asked when the automation program's cash should go to shareholders. The CFO favors paying out everything above the floor; the program office wants cash held for the rounds. Open AXIOM, choose Lab 2.5 and load the Meridian automation instance.</a:t>
+            </a:r>
+            <a:endParaRPr lang="en-US" sz="1500" dirty="0"/>
+          </a:p>
+        </p:txBody>
+      </p:sp>
+      <p:sp>
+        <p:nvSpPr>
+          <p:cNvPr id="7" name="Flow line"/>
           <p:cNvSpPr/>
           <p:nvPr/>
         </p:nvSpPr>
         <p:spPr>
           <a:xfrm>
-            <a:off x="548640" y="1737360"/>
-            <a:ext cx="566928" cy="566928"/>
+            <a:off x="1658082" y="2880360"/>
+            <a:ext cx="8875532" cy="0"/>
+          </a:xfrm>
+          <a:prstGeom prst="line">
+            <a:avLst/>
+          </a:prstGeom>
+          <a:noFill/>
+          <a:ln w="25400">
+            <a:solidFill>
+              <a:srgbClr val="C4CBD8"/>
+            </a:solidFill>
+            <a:prstDash val="solid"/>
+          </a:ln>
+        </p:spPr>
+      </p:sp>
+      <p:sp>
+        <p:nvSpPr>
+          <p:cNvPr id="8" name="Number"/>
+          <p:cNvSpPr/>
+          <p:nvPr/>
+        </p:nvSpPr>
+        <p:spPr>
+          <a:xfrm>
+            <a:off x="1383762" y="2606040"/>
+            <a:ext cx="548640" cy="548640"/>
           </a:xfrm>
           <a:prstGeom prst="ellipse">
             <a:avLst/>
@@ -12494,14 +12650,14 @@
       </p:sp>
       <p:sp>
         <p:nvSpPr>
-          <p:cNvPr id="6" name="Text 3"/>
+          <p:cNvPr id="9" name="Text 5"/>
           <p:cNvSpPr txBox="1"/>
           <p:nvPr/>
         </p:nvSpPr>
         <p:spPr>
           <a:xfrm>
-            <a:off x="548640" y="1737360"/>
-            <a:ext cx="566928" cy="566928"/>
+            <a:off x="1383762" y="2606040"/>
+            <a:ext cx="548640" cy="548640"/>
           </a:xfrm>
           <a:prstGeom prst="rect">
             <a:avLst/>
@@ -12517,7 +12673,7 @@
               <a:buNone/>
             </a:pPr>
             <a:r>
-              <a:rPr lang="en-US" sz="1500" b="1" dirty="0">
+              <a:rPr lang="en-US" sz="1600" b="1" dirty="0">
                 <a:solidFill>
                   <a:schemeClr val="bg1"/>
                 </a:solidFill>
@@ -12527,20 +12683,20 @@
               </a:rPr>
               <a:t>1</a:t>
             </a:r>
-            <a:endParaRPr lang="en-US" sz="1500" dirty="0"/>
-          </a:p>
-        </p:txBody>
-      </p:sp>
-      <p:sp>
-        <p:nvSpPr>
-          <p:cNvPr id="7" name="Row text"/>
+            <a:endParaRPr lang="en-US" sz="1600" dirty="0"/>
+          </a:p>
+        </p:txBody>
+      </p:sp>
+      <p:sp>
+        <p:nvSpPr>
+          <p:cNvPr id="10" name="Flow head"/>
           <p:cNvSpPr txBox="1"/>
           <p:nvPr/>
         </p:nvSpPr>
         <p:spPr>
           <a:xfrm>
-            <a:off x="1325880" y="1691640"/>
-            <a:ext cx="10317175" cy="841248"/>
+            <a:off x="621792" y="3291840"/>
+            <a:ext cx="2072579" cy="548640"/>
           </a:xfrm>
           <a:prstGeom prst="rect">
             <a:avLst/>
@@ -12549,34 +12705,73 @@
           <a:ln/>
         </p:spPr>
         <p:txBody>
-          <a:bodyPr wrap="square" lIns="0" tIns="0" rIns="0" bIns="0" rtlCol="0" anchor="ctr"/>
-          <a:lstStyle/>
-          <a:p>
-            <a:pPr indent="0" marL="0">
+          <a:bodyPr wrap="square" lIns="0" tIns="0" rIns="0" bIns="0" rtlCol="0" anchor="t"/>
+          <a:lstStyle/>
+          <a:p>
+            <a:pPr algn="ctr" indent="0" marL="0">
               <a:buNone/>
             </a:pPr>
             <a:r>
-              <a:rPr lang="en-US" sz="1500" dirty="0">
+              <a:rPr lang="en-US" sz="1600" b="1" dirty="0">
                 <a:solidFill>
                   <a:schemeClr val="tx1"/>
                 </a:solidFill>
-              </a:rPr>
-              <a:t>Time adds stocks, delays, and commitments on whole paths; deciding period by period ignores them and can break commitments or lose any share of the value.</a:t>
-            </a:r>
-            <a:endParaRPr lang="en-US" sz="1500" dirty="0"/>
-          </a:p>
-        </p:txBody>
-      </p:sp>
-      <p:sp>
-        <p:nvSpPr>
-          <p:cNvPr id="8" name="Number"/>
+                <a:latin typeface="Cambria" pitchFamily="34" charset="0"/>
+                <a:ea typeface="Cambria" pitchFamily="34" charset="-122"/>
+                <a:cs typeface="Cambria" pitchFamily="34" charset="-120"/>
+              </a:rPr>
+              <a:t>Simulate</a:t>
+            </a:r>
+            <a:endParaRPr lang="en-US" sz="1600" dirty="0"/>
+          </a:p>
+        </p:txBody>
+      </p:sp>
+      <p:sp>
+        <p:nvSpPr>
+          <p:cNvPr id="11" name="Flow text"/>
+          <p:cNvSpPr txBox="1"/>
+          <p:nvPr/>
+        </p:nvSpPr>
+        <p:spPr>
+          <a:xfrm>
+            <a:off x="640080" y="3867912"/>
+            <a:ext cx="2036003" cy="1554480"/>
+          </a:xfrm>
+          <a:prstGeom prst="rect">
+            <a:avLst/>
+          </a:prstGeom>
+          <a:noFill/>
+          <a:ln/>
+        </p:spPr>
+        <p:txBody>
+          <a:bodyPr wrap="square" lIns="0" tIns="0" rIns="0" bIns="0" rtlCol="0" anchor="t"/>
+          <a:lstStyle/>
+          <a:p>
+            <a:pPr algn="ctr" indent="0" marL="0">
+              <a:buNone/>
+            </a:pPr>
+            <a:r>
+              <a:rPr lang="en-US" sz="1400" dirty="0">
+                <a:solidFill>
+                  <a:schemeClr val="tx2"/>
+                </a:solidFill>
+              </a:rPr>
+              <a:t>Run the CFO's rule and the war-chest rule; watch cash against the floor and the $470m line.</a:t>
+            </a:r>
+            <a:endParaRPr lang="en-US" sz="1400" dirty="0"/>
+          </a:p>
+        </p:txBody>
+      </p:sp>
+      <p:sp>
+        <p:nvSpPr>
+          <p:cNvPr id="12" name="Number"/>
           <p:cNvSpPr/>
           <p:nvPr/>
         </p:nvSpPr>
         <p:spPr>
           <a:xfrm>
-            <a:off x="548640" y="2633472"/>
-            <a:ext cx="566928" cy="566928"/>
+            <a:off x="3602645" y="2606040"/>
+            <a:ext cx="548640" cy="548640"/>
           </a:xfrm>
           <a:prstGeom prst="ellipse">
             <a:avLst/>
@@ -12594,14 +12789,14 @@
       </p:sp>
       <p:sp>
         <p:nvSpPr>
-          <p:cNvPr id="9" name="Text 6"/>
+          <p:cNvPr id="13" name="Text 9"/>
           <p:cNvSpPr txBox="1"/>
           <p:nvPr/>
         </p:nvSpPr>
         <p:spPr>
           <a:xfrm>
-            <a:off x="548640" y="2633472"/>
-            <a:ext cx="566928" cy="566928"/>
+            <a:off x="3602645" y="2606040"/>
+            <a:ext cx="548640" cy="548640"/>
           </a:xfrm>
           <a:prstGeom prst="rect">
             <a:avLst/>
@@ -12617,7 +12812,7 @@
               <a:buNone/>
             </a:pPr>
             <a:r>
-              <a:rPr lang="en-US" sz="1500" b="1" dirty="0">
+              <a:rPr lang="en-US" sz="1600" b="1" dirty="0">
                 <a:solidFill>
                   <a:schemeClr val="bg1"/>
                 </a:solidFill>
@@ -12627,20 +12822,20 @@
               </a:rPr>
               <a:t>2</a:t>
             </a:r>
-            <a:endParaRPr lang="en-US" sz="1500" dirty="0"/>
-          </a:p>
-        </p:txBody>
-      </p:sp>
-      <p:sp>
-        <p:nvSpPr>
-          <p:cNvPr id="10" name="Row text"/>
+            <a:endParaRPr lang="en-US" sz="1600" dirty="0"/>
+          </a:p>
+        </p:txBody>
+      </p:sp>
+      <p:sp>
+        <p:nvSpPr>
+          <p:cNvPr id="14" name="Flow head"/>
           <p:cNvSpPr txBox="1"/>
           <p:nvPr/>
         </p:nvSpPr>
         <p:spPr>
           <a:xfrm>
-            <a:off x="1325880" y="2587752"/>
-            <a:ext cx="10317175" cy="841248"/>
+            <a:off x="2840675" y="3291840"/>
+            <a:ext cx="2072579" cy="548640"/>
           </a:xfrm>
           <a:prstGeom prst="rect">
             <a:avLst/>
@@ -12649,34 +12844,73 @@
           <a:ln/>
         </p:spPr>
         <p:txBody>
-          <a:bodyPr wrap="square" lIns="0" tIns="0" rIns="0" bIns="0" rtlCol="0" anchor="ctr"/>
-          <a:lstStyle/>
-          <a:p>
-            <a:pPr indent="0" marL="0">
+          <a:bodyPr wrap="square" lIns="0" tIns="0" rIns="0" bIns="0" rtlCol="0" anchor="t"/>
+          <a:lstStyle/>
+          <a:p>
+            <a:pPr algn="ctr" indent="0" marL="0">
               <a:buNone/>
             </a:pPr>
             <a:r>
-              <a:rPr lang="en-US" sz="1500" dirty="0">
+              <a:rPr lang="en-US" sz="1600" b="1" dirty="0">
                 <a:solidFill>
                   <a:schemeClr val="tx1"/>
                 </a:solidFill>
-              </a:rPr>
-              <a:t>A dynamic instance declares its period, its discount, and its terminal value as well as its dynamics and commitments (Definition 5.1); a best plan exists under compactness, and in continuous time under convexity in the decisions.</a:t>
-            </a:r>
-            <a:endParaRPr lang="en-US" sz="1500" dirty="0"/>
-          </a:p>
-        </p:txBody>
-      </p:sp>
-      <p:sp>
-        <p:nvSpPr>
-          <p:cNvPr id="11" name="Number"/>
+                <a:latin typeface="Cambria" pitchFamily="34" charset="0"/>
+                <a:ea typeface="Cambria" pitchFamily="34" charset="-122"/>
+                <a:cs typeface="Cambria" pitchFamily="34" charset="-120"/>
+              </a:rPr>
+              <a:t>Transcribe</a:t>
+            </a:r>
+            <a:endParaRPr lang="en-US" sz="1600" dirty="0"/>
+          </a:p>
+        </p:txBody>
+      </p:sp>
+      <p:sp>
+        <p:nvSpPr>
+          <p:cNvPr id="15" name="Flow text"/>
+          <p:cNvSpPr txBox="1"/>
+          <p:nvPr/>
+        </p:nvSpPr>
+        <p:spPr>
+          <a:xfrm>
+            <a:off x="2858963" y="3867912"/>
+            <a:ext cx="2036003" cy="1554480"/>
+          </a:xfrm>
+          <a:prstGeom prst="rect">
+            <a:avLst/>
+          </a:prstGeom>
+          <a:noFill/>
+          <a:ln/>
+        </p:spPr>
+        <p:txBody>
+          <a:bodyPr wrap="square" lIns="0" tIns="0" rIns="0" bIns="0" rtlCol="0" anchor="t"/>
+          <a:lstStyle/>
+          <a:p>
+            <a:pPr algn="ctr" indent="0" marL="0">
+              <a:buNone/>
+            </a:pPr>
+            <a:r>
+              <a:rPr lang="en-US" sz="1400" dirty="0">
+                <a:solidFill>
+                  <a:schemeClr val="tx2"/>
+                </a:solidFill>
+              </a:rPr>
+              <a:t>Transcribe the six years and hand the program to the AXIOM-04 solvers; record the best plan.</a:t>
+            </a:r>
+            <a:endParaRPr lang="en-US" sz="1400" dirty="0"/>
+          </a:p>
+        </p:txBody>
+      </p:sp>
+      <p:sp>
+        <p:nvSpPr>
+          <p:cNvPr id="16" name="Number"/>
           <p:cNvSpPr/>
           <p:nvPr/>
         </p:nvSpPr>
         <p:spPr>
           <a:xfrm>
-            <a:off x="548640" y="3529584"/>
-            <a:ext cx="566928" cy="566928"/>
+            <a:off x="5821528" y="2606040"/>
+            <a:ext cx="548640" cy="548640"/>
           </a:xfrm>
           <a:prstGeom prst="ellipse">
             <a:avLst/>
@@ -12694,14 +12928,14 @@
       </p:sp>
       <p:sp>
         <p:nvSpPr>
-          <p:cNvPr id="12" name="Text 9"/>
+          <p:cNvPr id="17" name="Text 13"/>
           <p:cNvSpPr txBox="1"/>
           <p:nvPr/>
         </p:nvSpPr>
         <p:spPr>
           <a:xfrm>
-            <a:off x="548640" y="3529584"/>
-            <a:ext cx="566928" cy="566928"/>
+            <a:off x="5821528" y="2606040"/>
+            <a:ext cx="548640" cy="548640"/>
           </a:xfrm>
           <a:prstGeom prst="rect">
             <a:avLst/>
@@ -12717,7 +12951,7 @@
               <a:buNone/>
             </a:pPr>
             <a:r>
-              <a:rPr lang="en-US" sz="1500" b="1" dirty="0">
+              <a:rPr lang="en-US" sz="1600" b="1" dirty="0">
                 <a:solidFill>
                   <a:schemeClr val="bg1"/>
                 </a:solidFill>
@@ -12727,20 +12961,20 @@
               </a:rPr>
               <a:t>3</a:t>
             </a:r>
-            <a:endParaRPr lang="en-US" sz="1500" dirty="0"/>
-          </a:p>
-        </p:txBody>
-      </p:sp>
-      <p:sp>
-        <p:nvSpPr>
-          <p:cNvPr id="13" name="Row text"/>
+            <a:endParaRPr lang="en-US" sz="1600" dirty="0"/>
+          </a:p>
+        </p:txBody>
+      </p:sp>
+      <p:sp>
+        <p:nvSpPr>
+          <p:cNvPr id="18" name="Flow head"/>
           <p:cNvSpPr txBox="1"/>
           <p:nvPr/>
         </p:nvSpPr>
         <p:spPr>
           <a:xfrm>
-            <a:off x="1325880" y="3483864"/>
-            <a:ext cx="10317175" cy="841248"/>
+            <a:off x="5059558" y="3291840"/>
+            <a:ext cx="2072579" cy="548640"/>
           </a:xfrm>
           <a:prstGeom prst="rect">
             <a:avLst/>
@@ -12749,34 +12983,73 @@
           <a:ln/>
         </p:spPr>
         <p:txBody>
-          <a:bodyPr wrap="square" lIns="0" tIns="0" rIns="0" bIns="0" rtlCol="0" anchor="ctr"/>
-          <a:lstStyle/>
-          <a:p>
-            <a:pPr indent="0" marL="0">
+          <a:bodyPr wrap="square" lIns="0" tIns="0" rIns="0" bIns="0" rtlCol="0" anchor="t"/>
+          <a:lstStyle/>
+          <a:p>
+            <a:pPr algn="ctr" indent="0" marL="0">
               <a:buNone/>
             </a:pPr>
             <a:r>
-              <a:rPr lang="en-US" sz="1500" dirty="0">
+              <a:rPr lang="en-US" sz="1600" b="1" dirty="0">
                 <a:solidFill>
                   <a:schemeClr val="tx1"/>
                 </a:solidFill>
-              </a:rPr>
-              <a:t>Transcription turns the path into one program: a calendar's value is a floor that rises as the calendar is refined, and the multipliers of the dynamics are the prices of stocks over time (Theorem 5.1); at a best plan discounted marginal values are equal wherever a resource can move.</a:t>
-            </a:r>
-            <a:endParaRPr lang="en-US" sz="1500" dirty="0"/>
-          </a:p>
-        </p:txBody>
-      </p:sp>
-      <p:sp>
-        <p:nvSpPr>
-          <p:cNvPr id="14" name="Number"/>
+                <a:latin typeface="Cambria" pitchFamily="34" charset="0"/>
+                <a:ea typeface="Cambria" pitchFamily="34" charset="-122"/>
+                <a:cs typeface="Cambria" pitchFamily="34" charset="-120"/>
+              </a:rPr>
+              <a:t>Price</a:t>
+            </a:r>
+            <a:endParaRPr lang="en-US" sz="1600" dirty="0"/>
+          </a:p>
+        </p:txBody>
+      </p:sp>
+      <p:sp>
+        <p:nvSpPr>
+          <p:cNvPr id="19" name="Flow text"/>
+          <p:cNvSpPr txBox="1"/>
+          <p:nvPr/>
+        </p:nvSpPr>
+        <p:spPr>
+          <a:xfrm>
+            <a:off x="5077846" y="3867912"/>
+            <a:ext cx="2036003" cy="1554480"/>
+          </a:xfrm>
+          <a:prstGeom prst="rect">
+            <a:avLst/>
+          </a:prstGeom>
+          <a:noFill/>
+          <a:ln/>
+        </p:spPr>
+        <p:txBody>
+          <a:bodyPr wrap="square" lIns="0" tIns="0" rIns="0" bIns="0" rtlCol="0" anchor="t"/>
+          <a:lstStyle/>
+          <a:p>
+            <a:pPr algn="ctr" indent="0" marL="0">
+              <a:buNone/>
+            </a:pPr>
+            <a:r>
+              <a:rPr lang="en-US" sz="1400" dirty="0">
+                <a:solidFill>
+                  <a:schemeClr val="tx2"/>
+                </a:solidFill>
+              </a:rPr>
+              <a:t>Read the prices of cash and efficiency by year; check two by perturbing the instance.</a:t>
+            </a:r>
+            <a:endParaRPr lang="en-US" sz="1400" dirty="0"/>
+          </a:p>
+        </p:txBody>
+      </p:sp>
+      <p:sp>
+        <p:nvSpPr>
+          <p:cNvPr id="20" name="Number"/>
           <p:cNvSpPr/>
           <p:nvPr/>
         </p:nvSpPr>
         <p:spPr>
           <a:xfrm>
-            <a:off x="548640" y="4425696"/>
-            <a:ext cx="566928" cy="566928"/>
+            <a:off x="8040411" y="2606040"/>
+            <a:ext cx="548640" cy="548640"/>
           </a:xfrm>
           <a:prstGeom prst="ellipse">
             <a:avLst/>
@@ -12794,14 +13067,14 @@
       </p:sp>
       <p:sp>
         <p:nvSpPr>
-          <p:cNvPr id="15" name="Text 12"/>
+          <p:cNvPr id="21" name="Text 17"/>
           <p:cNvSpPr txBox="1"/>
           <p:nvPr/>
         </p:nvSpPr>
         <p:spPr>
           <a:xfrm>
-            <a:off x="548640" y="4425696"/>
-            <a:ext cx="566928" cy="566928"/>
+            <a:off x="8040411" y="2606040"/>
+            <a:ext cx="548640" cy="548640"/>
           </a:xfrm>
           <a:prstGeom prst="rect">
             <a:avLst/>
@@ -12817,7 +13090,7 @@
               <a:buNone/>
             </a:pPr>
             <a:r>
-              <a:rPr lang="en-US" sz="1500" b="1" dirty="0">
+              <a:rPr lang="en-US" sz="1600" b="1" dirty="0">
                 <a:solidFill>
                   <a:schemeClr val="bg1"/>
                 </a:solidFill>
@@ -12827,20 +13100,20 @@
               </a:rPr>
               <a:t>4</a:t>
             </a:r>
-            <a:endParaRPr lang="en-US" sz="1500" dirty="0"/>
-          </a:p>
-        </p:txBody>
-      </p:sp>
-      <p:sp>
-        <p:nvSpPr>
-          <p:cNvPr id="16" name="Row text"/>
+            <a:endParaRPr lang="en-US" sz="1600" dirty="0"/>
+          </a:p>
+        </p:txBody>
+      </p:sp>
+      <p:sp>
+        <p:nvSpPr>
+          <p:cNvPr id="22" name="Flow head"/>
           <p:cNvSpPr txBox="1"/>
           <p:nvPr/>
         </p:nvSpPr>
         <p:spPr>
           <a:xfrm>
-            <a:off x="1325880" y="4379976"/>
-            <a:ext cx="10317175" cy="841248"/>
+            <a:off x="7278441" y="3291840"/>
+            <a:ext cx="2072579" cy="548640"/>
           </a:xfrm>
           <a:prstGeom prst="rect">
             <a:avLst/>
@@ -12849,34 +13122,73 @@
           <a:ln/>
         </p:spPr>
         <p:txBody>
-          <a:bodyPr wrap="square" lIns="0" tIns="0" rIns="0" bIns="0" rtlCol="0" anchor="ctr"/>
-          <a:lstStyle/>
-          <a:p>
-            <a:pPr indent="0" marL="0">
+          <a:bodyPr wrap="square" lIns="0" tIns="0" rIns="0" bIns="0" rtlCol="0" anchor="t"/>
+          <a:lstStyle/>
+          <a:p>
+            <a:pPr algn="ctr" indent="0" marL="0">
               <a:buNone/>
             </a:pPr>
             <a:r>
-              <a:rPr lang="en-US" sz="1500" dirty="0">
+              <a:rPr lang="en-US" sz="1600" b="1" dirty="0">
                 <a:solidFill>
                   <a:schemeClr val="tx1"/>
                 </a:solidFill>
-              </a:rPr>
-              <a:t>The terminal value must stand for the value of continuing: without it a plan runs the company down, and an end condition must agree with it.</a:t>
-            </a:r>
-            <a:endParaRPr lang="en-US" sz="1500" dirty="0"/>
-          </a:p>
-        </p:txBody>
-      </p:sp>
-      <p:sp>
-        <p:nvSpPr>
-          <p:cNvPr id="17" name="Number"/>
+                <a:latin typeface="Cambria" pitchFamily="34" charset="0"/>
+                <a:ea typeface="Cambria" pitchFamily="34" charset="-122"/>
+                <a:cs typeface="Cambria" pitchFamily="34" charset="-120"/>
+              </a:rPr>
+              <a:t>Move the horizon and the rate</a:t>
+            </a:r>
+            <a:endParaRPr lang="en-US" sz="1600" dirty="0"/>
+          </a:p>
+        </p:txBody>
+      </p:sp>
+      <p:sp>
+        <p:nvSpPr>
+          <p:cNvPr id="23" name="Flow text"/>
+          <p:cNvSpPr txBox="1"/>
+          <p:nvPr/>
+        </p:nvSpPr>
+        <p:spPr>
+          <a:xfrm>
+            <a:off x="7296729" y="3867912"/>
+            <a:ext cx="2036003" cy="1554480"/>
+          </a:xfrm>
+          <a:prstGeom prst="rect">
+            <a:avLst/>
+          </a:prstGeom>
+          <a:noFill/>
+          <a:ln/>
+        </p:spPr>
+        <p:txBody>
+          <a:bodyPr wrap="square" lIns="0" tIns="0" rIns="0" bIns="0" rtlCol="0" anchor="t"/>
+          <a:lstStyle/>
+          <a:p>
+            <a:pPr algn="ctr" indent="0" marL="0">
+              <a:buNone/>
+            </a:pPr>
+            <a:r>
+              <a:rPr lang="en-US" sz="1400" dirty="0">
+                <a:solidFill>
+                  <a:schemeClr val="tx2"/>
+                </a:solidFill>
+              </a:rPr>
+              <a:t>Vary the hurdle rate from 3 to 30 percent, switch the terminal value, lengthen the window.</a:t>
+            </a:r>
+            <a:endParaRPr lang="en-US" sz="1400" dirty="0"/>
+          </a:p>
+        </p:txBody>
+      </p:sp>
+      <p:sp>
+        <p:nvSpPr>
+          <p:cNvPr id="24" name="Number"/>
           <p:cNvSpPr/>
           <p:nvPr/>
         </p:nvSpPr>
         <p:spPr>
           <a:xfrm>
-            <a:off x="548640" y="5321808"/>
-            <a:ext cx="566928" cy="566928"/>
+            <a:off x="10259294" y="2606040"/>
+            <a:ext cx="548640" cy="548640"/>
           </a:xfrm>
           <a:prstGeom prst="ellipse">
             <a:avLst/>
@@ -12894,14 +13206,14 @@
       </p:sp>
       <p:sp>
         <p:nvSpPr>
-          <p:cNvPr id="18" name="Text 15"/>
+          <p:cNvPr id="25" name="Text 21"/>
           <p:cNvSpPr txBox="1"/>
           <p:nvPr/>
         </p:nvSpPr>
         <p:spPr>
           <a:xfrm>
-            <a:off x="548640" y="5321808"/>
-            <a:ext cx="566928" cy="566928"/>
+            <a:off x="10259294" y="2606040"/>
+            <a:ext cx="548640" cy="548640"/>
           </a:xfrm>
           <a:prstGeom prst="rect">
             <a:avLst/>
@@ -12917,7 +13229,7 @@
               <a:buNone/>
             </a:pPr>
             <a:r>
-              <a:rPr lang="en-US" sz="1500" b="1" dirty="0">
+              <a:rPr lang="en-US" sz="1600" b="1" dirty="0">
                 <a:solidFill>
                   <a:schemeClr val="bg1"/>
                 </a:solidFill>
@@ -12927,20 +13239,20 @@
               </a:rPr>
               <a:t>5</a:t>
             </a:r>
-            <a:endParaRPr lang="en-US" sz="1500" dirty="0"/>
-          </a:p>
-        </p:txBody>
-      </p:sp>
-      <p:sp>
-        <p:nvSpPr>
-          <p:cNvPr id="19" name="Row text"/>
+            <a:endParaRPr lang="en-US" sz="1600" dirty="0"/>
+          </a:p>
+        </p:txBody>
+      </p:sp>
+      <p:sp>
+        <p:nvSpPr>
+          <p:cNvPr id="26" name="Flow head"/>
           <p:cNvSpPr txBox="1"/>
           <p:nvPr/>
         </p:nvSpPr>
         <p:spPr>
           <a:xfrm>
-            <a:off x="1325880" y="5276088"/>
-            <a:ext cx="10317175" cy="841248"/>
+            <a:off x="9497324" y="3291840"/>
+            <a:ext cx="2072579" cy="548640"/>
           </a:xfrm>
           <a:prstGeom prst="rect">
             <a:avLst/>
@@ -12949,6 +13261,108 @@
           <a:ln/>
         </p:spPr>
         <p:txBody>
+          <a:bodyPr wrap="square" lIns="0" tIns="0" rIns="0" bIns="0" rtlCol="0" anchor="t"/>
+          <a:lstStyle/>
+          <a:p>
+            <a:pPr algn="ctr" indent="0" marL="0">
+              <a:buNone/>
+            </a:pPr>
+            <a:r>
+              <a:rPr lang="en-US" sz="1600" b="1" dirty="0">
+                <a:solidFill>
+                  <a:schemeClr val="tx1"/>
+                </a:solidFill>
+                <a:latin typeface="Cambria" pitchFamily="34" charset="0"/>
+                <a:ea typeface="Cambria" pitchFamily="34" charset="-122"/>
+                <a:cs typeface="Cambria" pitchFamily="34" charset="-120"/>
+              </a:rPr>
+              <a:t>Stress</a:t>
+            </a:r>
+            <a:endParaRPr lang="en-US" sz="1600" dirty="0"/>
+          </a:p>
+        </p:txBody>
+      </p:sp>
+      <p:sp>
+        <p:nvSpPr>
+          <p:cNvPr id="27" name="Flow text"/>
+          <p:cNvSpPr txBox="1"/>
+          <p:nvPr/>
+        </p:nvSpPr>
+        <p:spPr>
+          <a:xfrm>
+            <a:off x="9515612" y="3867912"/>
+            <a:ext cx="2036003" cy="1554480"/>
+          </a:xfrm>
+          <a:prstGeom prst="rect">
+            <a:avLst/>
+          </a:prstGeom>
+          <a:noFill/>
+          <a:ln/>
+        </p:spPr>
+        <p:txBody>
+          <a:bodyPr wrap="square" lIns="0" tIns="0" rIns="0" bIns="0" rtlCol="0" anchor="t"/>
+          <a:lstStyle/>
+          <a:p>
+            <a:pPr algn="ctr" indent="0" marL="0">
+              <a:buNone/>
+            </a:pPr>
+            <a:r>
+              <a:rPr lang="en-US" sz="1400" dirty="0">
+                <a:solidFill>
+                  <a:schemeClr val="tx2"/>
+                </a:solidFill>
+              </a:rPr>
+              <a:t>Make each round a point short; run Step 3's schedule and the war-chest rule side by side.</a:t>
+            </a:r>
+            <a:endParaRPr lang="en-US" sz="1400" dirty="0"/>
+          </a:p>
+        </p:txBody>
+      </p:sp>
+      <p:sp>
+        <p:nvSpPr>
+          <p:cNvPr id="28" name="Deliverable card"/>
+          <p:cNvSpPr/>
+          <p:nvPr/>
+        </p:nvSpPr>
+        <p:spPr>
+          <a:xfrm>
+            <a:off x="548640" y="5486400"/>
+            <a:ext cx="11094415" cy="685800"/>
+          </a:xfrm>
+          <a:prstGeom prst="roundRect">
+            <a:avLst>
+              <a:gd name="adj" fmla="val 10667"/>
+            </a:avLst>
+          </a:prstGeom>
+          <a:solidFill>
+            <a:schemeClr val="bg2"/>
+          </a:solidFill>
+          <a:ln w="9525">
+            <a:solidFill>
+              <a:srgbClr val="C4CBD8"/>
+            </a:solidFill>
+            <a:prstDash val="solid"/>
+          </a:ln>
+        </p:spPr>
+      </p:sp>
+      <p:sp>
+        <p:nvSpPr>
+          <p:cNvPr id="29" name="Deliverable"/>
+          <p:cNvSpPr txBox="1"/>
+          <p:nvPr/>
+        </p:nvSpPr>
+        <p:spPr>
+          <a:xfrm>
+            <a:off x="777240" y="5559552"/>
+            <a:ext cx="10637215" cy="539496"/>
+          </a:xfrm>
+          <a:prstGeom prst="rect">
+            <a:avLst/>
+          </a:prstGeom>
+          <a:noFill/>
+          <a:ln/>
+        </p:spPr>
+        <p:txBody>
           <a:bodyPr wrap="square" lIns="0" tIns="0" rIns="0" bIns="0" rtlCol="0" anchor="ctr"/>
           <a:lstStyle/>
           <a:p>
@@ -12956,14 +13370,22 @@
               <a:buNone/>
             </a:pPr>
             <a:r>
-              <a:rPr lang="en-US" sz="1500" dirty="0">
+              <a:rPr lang="en-US" sz="1400" b="1" dirty="0">
                 <a:solidFill>
                   <a:schemeClr val="tx1"/>
                 </a:solidFill>
               </a:rPr>
-              <a:t>With exponential discounting re-planning confirms the best plan; present bias and windows without terminal values reverse it (Theorem 5.3); and when the forecast fails, a rule keeps commitments that a schedule breaks.</a:t>
-            </a:r>
-            <a:endParaRPr lang="en-US" sz="1500" dirty="0"/>
+              <a:t>Deliverable:</a:t>
+            </a:r>
+            <a:r>
+              <a:rPr lang="en-US" sz="1400" dirty="0">
+                <a:solidFill>
+                  <a:schemeClr val="tx1"/>
+                </a:solidFill>
+              </a:rPr>
+              <a:t> a one-page note to the board recommending a payout rule, with its value, the war chest by year, the price of the end condition, and the plan's behavior when the rounds fall short. About 75 minutes.</a:t>
+            </a:r>
+            <a:endParaRPr lang="en-US" sz="1400" dirty="0"/>
           </a:p>
         </p:txBody>
       </p:sp>
@@ -13069,7 +13491,7 @@
                   <a:schemeClr val="accent1"/>
                 </a:solidFill>
               </a:rPr>
-              <a:t>THIS WEEK'S LABORATORY</a:t>
+              <a:t>KEY TAKEAWAYS</a:t>
             </a:r>
             <a:endParaRPr lang="en-US" sz="1200" dirty="0"/>
           </a:p>
@@ -13110,7 +13532,7 @@
                 <a:ea typeface="Cambria" pitchFamily="34" charset="-122"/>
                 <a:cs typeface="Cambria" pitchFamily="34" charset="-120"/>
               </a:rPr>
-              <a:t>Notebook and workbook reproduce the book</a:t>
+              <a:t>What to carry forward</a:t>
             </a:r>
             <a:endParaRPr lang="en-US" sz="3200" dirty="0"/>
           </a:p>
@@ -13118,26 +13540,24 @@
       </p:sp>
       <p:sp>
         <p:nvSpPr>
-          <p:cNvPr id="5" name="Stat card"/>
+          <p:cNvPr id="5" name="Number"/>
           <p:cNvSpPr/>
           <p:nvPr/>
         </p:nvSpPr>
         <p:spPr>
           <a:xfrm>
-            <a:off x="548640" y="1691640"/>
-            <a:ext cx="2567864" cy="1691640"/>
-          </a:xfrm>
-          <a:prstGeom prst="roundRect">
-            <a:avLst>
-              <a:gd name="adj" fmla="val 4324"/>
-            </a:avLst>
+            <a:off x="548640" y="1737360"/>
+            <a:ext cx="566928" cy="566928"/>
+          </a:xfrm>
+          <a:prstGeom prst="ellipse">
+            <a:avLst/>
           </a:prstGeom>
           <a:solidFill>
-            <a:schemeClr val="tx1"/>
+            <a:schemeClr val="accent1"/>
           </a:solidFill>
-          <a:ln w="9525">
+          <a:ln w="6350">
             <a:solidFill>
-              <a:srgbClr val="0F1E3D"/>
+              <a:schemeClr val="accent1"/>
             </a:solidFill>
             <a:prstDash val="solid"/>
           </a:ln>
@@ -13145,14 +13565,14 @@
       </p:sp>
       <p:sp>
         <p:nvSpPr>
-          <p:cNvPr id="6" name="Stat value"/>
+          <p:cNvPr id="6" name="Text 3"/>
           <p:cNvSpPr txBox="1"/>
           <p:nvPr/>
         </p:nvSpPr>
         <p:spPr>
           <a:xfrm>
-            <a:off x="685800" y="1801368"/>
-            <a:ext cx="2293544" cy="914400"/>
+            <a:off x="548640" y="1737360"/>
+            <a:ext cx="566928" cy="566928"/>
           </a:xfrm>
           <a:prstGeom prst="rect">
             <a:avLst/>
@@ -13168,30 +13588,30 @@
               <a:buNone/>
             </a:pPr>
             <a:r>
-              <a:rPr lang="en-US" sz="4400" b="1" dirty="0">
-                <a:solidFill>
-                  <a:schemeClr val="accent1"/>
-                </a:solidFill>
-                <a:latin typeface="Cambria" pitchFamily="34" charset="0"/>
-                <a:ea typeface="Cambria" pitchFamily="34" charset="-122"/>
-                <a:cs typeface="Cambria" pitchFamily="34" charset="-120"/>
-              </a:rPr>
-              <a:t>36</a:t>
-            </a:r>
-            <a:endParaRPr lang="en-US" sz="4400" dirty="0"/>
-          </a:p>
-        </p:txBody>
-      </p:sp>
-      <p:sp>
-        <p:nvSpPr>
-          <p:cNvPr id="7" name="Stat label"/>
+              <a:rPr lang="en-US" sz="1500" b="1" dirty="0">
+                <a:solidFill>
+                  <a:schemeClr val="bg1"/>
+                </a:solidFill>
+                <a:latin typeface="Calibri" pitchFamily="34" charset="0"/>
+                <a:ea typeface="Calibri" pitchFamily="34" charset="-122"/>
+                <a:cs typeface="Calibri" pitchFamily="34" charset="-120"/>
+              </a:rPr>
+              <a:t>1</a:t>
+            </a:r>
+            <a:endParaRPr lang="en-US" sz="1500" dirty="0"/>
+          </a:p>
+        </p:txBody>
+      </p:sp>
+      <p:sp>
+        <p:nvSpPr>
+          <p:cNvPr id="7" name="Row text"/>
           <p:cNvSpPr txBox="1"/>
           <p:nvPr/>
         </p:nvSpPr>
         <p:spPr>
           <a:xfrm>
-            <a:off x="685800" y="2697480"/>
-            <a:ext cx="2293544" cy="612648"/>
+            <a:off x="1325880" y="1691640"/>
+            <a:ext cx="10317175" cy="841248"/>
           </a:xfrm>
           <a:prstGeom prst="rect">
             <a:avLst/>
@@ -13200,46 +13620,44 @@
           <a:ln/>
         </p:spPr>
         <p:txBody>
-          <a:bodyPr wrap="square" lIns="0" tIns="0" rIns="0" bIns="0" rtlCol="0" anchor="t"/>
-          <a:lstStyle/>
-          <a:p>
-            <a:pPr algn="ctr" indent="0" marL="0">
+          <a:bodyPr wrap="square" lIns="0" tIns="0" rIns="0" bIns="0" rtlCol="0" anchor="ctr"/>
+          <a:lstStyle/>
+          <a:p>
+            <a:pPr indent="0" marL="0">
               <a:buNone/>
             </a:pPr>
             <a:r>
-              <a:rPr lang="en-US" sz="1400" dirty="0">
-                <a:solidFill>
-                  <a:schemeClr val="bg2"/>
-                </a:solidFill>
-              </a:rPr>
-              <a:t>notebook checkpoints, every one PASS</a:t>
-            </a:r>
-            <a:endParaRPr lang="en-US" sz="1400" dirty="0"/>
-          </a:p>
-        </p:txBody>
-      </p:sp>
-      <p:sp>
-        <p:nvSpPr>
-          <p:cNvPr id="8" name="Stat card"/>
+              <a:rPr lang="en-US" sz="1500" dirty="0">
+                <a:solidFill>
+                  <a:schemeClr val="tx1"/>
+                </a:solidFill>
+              </a:rPr>
+              <a:t>Time adds stocks, delays, and commitments on whole paths; deciding period by period ignores them and can break commitments or lose any share of the value.</a:t>
+            </a:r>
+            <a:endParaRPr lang="en-US" sz="1500" dirty="0"/>
+          </a:p>
+        </p:txBody>
+      </p:sp>
+      <p:sp>
+        <p:nvSpPr>
+          <p:cNvPr id="8" name="Number"/>
           <p:cNvSpPr/>
           <p:nvPr/>
         </p:nvSpPr>
         <p:spPr>
           <a:xfrm>
-            <a:off x="3390824" y="1691640"/>
-            <a:ext cx="2567864" cy="1691640"/>
-          </a:xfrm>
-          <a:prstGeom prst="roundRect">
-            <a:avLst>
-              <a:gd name="adj" fmla="val 4324"/>
-            </a:avLst>
+            <a:off x="548640" y="2633472"/>
+            <a:ext cx="566928" cy="566928"/>
+          </a:xfrm>
+          <a:prstGeom prst="ellipse">
+            <a:avLst/>
           </a:prstGeom>
           <a:solidFill>
-            <a:schemeClr val="bg2"/>
+            <a:schemeClr val="accent1"/>
           </a:solidFill>
-          <a:ln w="9525">
+          <a:ln w="6350">
             <a:solidFill>
-              <a:srgbClr val="C4CBD8"/>
+              <a:schemeClr val="accent1"/>
             </a:solidFill>
             <a:prstDash val="solid"/>
           </a:ln>
@@ -13247,14 +13665,14 @@
       </p:sp>
       <p:sp>
         <p:nvSpPr>
-          <p:cNvPr id="9" name="Stat value"/>
+          <p:cNvPr id="9" name="Text 6"/>
           <p:cNvSpPr txBox="1"/>
           <p:nvPr/>
         </p:nvSpPr>
         <p:spPr>
           <a:xfrm>
-            <a:off x="3527984" y="1801368"/>
-            <a:ext cx="2293544" cy="914400"/>
+            <a:off x="548640" y="2633472"/>
+            <a:ext cx="566928" cy="566928"/>
           </a:xfrm>
           <a:prstGeom prst="rect">
             <a:avLst/>
@@ -13270,30 +13688,30 @@
               <a:buNone/>
             </a:pPr>
             <a:r>
-              <a:rPr lang="en-US" sz="4400" b="1" dirty="0">
-                <a:solidFill>
-                  <a:schemeClr val="tx1"/>
-                </a:solidFill>
-                <a:latin typeface="Cambria" pitchFamily="34" charset="0"/>
-                <a:ea typeface="Cambria" pitchFamily="34" charset="-122"/>
-                <a:cs typeface="Cambria" pitchFamily="34" charset="-120"/>
-              </a:rPr>
-              <a:t>46</a:t>
-            </a:r>
-            <a:endParaRPr lang="en-US" sz="4400" dirty="0"/>
-          </a:p>
-        </p:txBody>
-      </p:sp>
-      <p:sp>
-        <p:nvSpPr>
-          <p:cNvPr id="10" name="Stat label"/>
+              <a:rPr lang="en-US" sz="1500" b="1" dirty="0">
+                <a:solidFill>
+                  <a:schemeClr val="bg1"/>
+                </a:solidFill>
+                <a:latin typeface="Calibri" pitchFamily="34" charset="0"/>
+                <a:ea typeface="Calibri" pitchFamily="34" charset="-122"/>
+                <a:cs typeface="Calibri" pitchFamily="34" charset="-120"/>
+              </a:rPr>
+              <a:t>2</a:t>
+            </a:r>
+            <a:endParaRPr lang="en-US" sz="1500" dirty="0"/>
+          </a:p>
+        </p:txBody>
+      </p:sp>
+      <p:sp>
+        <p:nvSpPr>
+          <p:cNvPr id="10" name="Row text"/>
           <p:cNvSpPr txBox="1"/>
           <p:nvPr/>
         </p:nvSpPr>
         <p:spPr>
           <a:xfrm>
-            <a:off x="3527984" y="2697480"/>
-            <a:ext cx="2293544" cy="612648"/>
+            <a:off x="1325880" y="2587752"/>
+            <a:ext cx="10317175" cy="841248"/>
           </a:xfrm>
           <a:prstGeom prst="rect">
             <a:avLst/>
@@ -13302,46 +13720,44 @@
           <a:ln/>
         </p:spPr>
         <p:txBody>
-          <a:bodyPr wrap="square" lIns="0" tIns="0" rIns="0" bIns="0" rtlCol="0" anchor="t"/>
-          <a:lstStyle/>
-          <a:p>
-            <a:pPr algn="ctr" indent="0" marL="0">
+          <a:bodyPr wrap="square" lIns="0" tIns="0" rIns="0" bIns="0" rtlCol="0" anchor="ctr"/>
+          <a:lstStyle/>
+          <a:p>
+            <a:pPr indent="0" marL="0">
               <a:buNone/>
             </a:pPr>
             <a:r>
-              <a:rPr lang="en-US" sz="1400" dirty="0">
-                <a:solidFill>
-                  <a:schemeClr val="tx2"/>
-                </a:solidFill>
-              </a:rPr>
-              <a:t>workbook checks against the engine, ALL PASS</a:t>
-            </a:r>
-            <a:endParaRPr lang="en-US" sz="1400" dirty="0"/>
-          </a:p>
-        </p:txBody>
-      </p:sp>
-      <p:sp>
-        <p:nvSpPr>
-          <p:cNvPr id="11" name="Stat card"/>
+              <a:rPr lang="en-US" sz="1500" dirty="0">
+                <a:solidFill>
+                  <a:schemeClr val="tx1"/>
+                </a:solidFill>
+              </a:rPr>
+              <a:t>A dynamic instance declares its period, its discount, and its terminal value as well as its dynamics and commitments (Definition 5.1); a best plan exists under compactness, and in continuous time under convexity in the decisions.</a:t>
+            </a:r>
+            <a:endParaRPr lang="en-US" sz="1500" dirty="0"/>
+          </a:p>
+        </p:txBody>
+      </p:sp>
+      <p:sp>
+        <p:nvSpPr>
+          <p:cNvPr id="11" name="Number"/>
           <p:cNvSpPr/>
           <p:nvPr/>
         </p:nvSpPr>
         <p:spPr>
           <a:xfrm>
-            <a:off x="6233008" y="1691640"/>
-            <a:ext cx="2567864" cy="1691640"/>
-          </a:xfrm>
-          <a:prstGeom prst="roundRect">
-            <a:avLst>
-              <a:gd name="adj" fmla="val 4324"/>
-            </a:avLst>
+            <a:off x="548640" y="3529584"/>
+            <a:ext cx="566928" cy="566928"/>
+          </a:xfrm>
+          <a:prstGeom prst="ellipse">
+            <a:avLst/>
           </a:prstGeom>
           <a:solidFill>
-            <a:schemeClr val="bg2"/>
+            <a:schemeClr val="accent1"/>
           </a:solidFill>
-          <a:ln w="9525">
+          <a:ln w="6350">
             <a:solidFill>
-              <a:srgbClr val="C4CBD8"/>
+              <a:schemeClr val="accent1"/>
             </a:solidFill>
             <a:prstDash val="solid"/>
           </a:ln>
@@ -13349,14 +13765,14 @@
       </p:sp>
       <p:sp>
         <p:nvSpPr>
-          <p:cNvPr id="12" name="Stat value"/>
+          <p:cNvPr id="12" name="Text 9"/>
           <p:cNvSpPr txBox="1"/>
           <p:nvPr/>
         </p:nvSpPr>
         <p:spPr>
           <a:xfrm>
-            <a:off x="6370168" y="1801368"/>
-            <a:ext cx="2293544" cy="914400"/>
+            <a:off x="548640" y="3529584"/>
+            <a:ext cx="566928" cy="566928"/>
           </a:xfrm>
           <a:prstGeom prst="rect">
             <a:avLst/>
@@ -13372,30 +13788,30 @@
               <a:buNone/>
             </a:pPr>
             <a:r>
-              <a:rPr lang="en-US" sz="4400" b="1" dirty="0">
-                <a:solidFill>
-                  <a:schemeClr val="tx1"/>
-                </a:solidFill>
-                <a:latin typeface="Cambria" pitchFamily="34" charset="0"/>
-                <a:ea typeface="Cambria" pitchFamily="34" charset="-122"/>
-                <a:cs typeface="Cambria" pitchFamily="34" charset="-120"/>
-              </a:rPr>
-              <a:t>26205</a:t>
-            </a:r>
-            <a:endParaRPr lang="en-US" sz="4400" dirty="0"/>
-          </a:p>
-        </p:txBody>
-      </p:sp>
-      <p:sp>
-        <p:nvSpPr>
-          <p:cNvPr id="13" name="Stat label"/>
+              <a:rPr lang="en-US" sz="1500" b="1" dirty="0">
+                <a:solidFill>
+                  <a:schemeClr val="bg1"/>
+                </a:solidFill>
+                <a:latin typeface="Calibri" pitchFamily="34" charset="0"/>
+                <a:ea typeface="Calibri" pitchFamily="34" charset="-122"/>
+                <a:cs typeface="Calibri" pitchFamily="34" charset="-120"/>
+              </a:rPr>
+              <a:t>3</a:t>
+            </a:r>
+            <a:endParaRPr lang="en-US" sz="1500" dirty="0"/>
+          </a:p>
+        </p:txBody>
+      </p:sp>
+      <p:sp>
+        <p:nvSpPr>
+          <p:cNvPr id="13" name="Row text"/>
           <p:cNvSpPr txBox="1"/>
           <p:nvPr/>
         </p:nvSpPr>
         <p:spPr>
           <a:xfrm>
-            <a:off x="6370168" y="2697480"/>
-            <a:ext cx="2293544" cy="612648"/>
+            <a:off x="1325880" y="3483864"/>
+            <a:ext cx="10317175" cy="841248"/>
           </a:xfrm>
           <a:prstGeom prst="rect">
             <a:avLst/>
@@ -13404,46 +13820,44 @@
           <a:ln/>
         </p:spPr>
         <p:txBody>
-          <a:bodyPr wrap="square" lIns="0" tIns="0" rIns="0" bIns="0" rtlCol="0" anchor="t"/>
-          <a:lstStyle/>
-          <a:p>
-            <a:pPr algn="ctr" indent="0" marL="0">
+          <a:bodyPr wrap="square" lIns="0" tIns="0" rIns="0" bIns="0" rtlCol="0" anchor="ctr"/>
+          <a:lstStyle/>
+          <a:p>
+            <a:pPr indent="0" marL="0">
               <a:buNone/>
             </a:pPr>
             <a:r>
-              <a:rPr lang="en-US" sz="1400" dirty="0">
-                <a:solidFill>
-                  <a:schemeClr val="tx2"/>
-                </a:solidFill>
-              </a:rPr>
-              <a:t>the lab's seed</a:t>
-            </a:r>
-            <a:endParaRPr lang="en-US" sz="1400" dirty="0"/>
-          </a:p>
-        </p:txBody>
-      </p:sp>
-      <p:sp>
-        <p:nvSpPr>
-          <p:cNvPr id="14" name="Stat card"/>
+              <a:rPr lang="en-US" sz="1500" dirty="0">
+                <a:solidFill>
+                  <a:schemeClr val="tx1"/>
+                </a:solidFill>
+              </a:rPr>
+              <a:t>Transcription turns the path into one program: a calendar's value is a floor that rises as the calendar is refined, and the multipliers of the dynamics are the prices of stocks over time (Theorem 5.1); at a best plan discounted marginal values are equal wherever a resource can move.</a:t>
+            </a:r>
+            <a:endParaRPr lang="en-US" sz="1500" dirty="0"/>
+          </a:p>
+        </p:txBody>
+      </p:sp>
+      <p:sp>
+        <p:nvSpPr>
+          <p:cNvPr id="14" name="Number"/>
           <p:cNvSpPr/>
           <p:nvPr/>
         </p:nvSpPr>
         <p:spPr>
           <a:xfrm>
-            <a:off x="9075191" y="1691640"/>
-            <a:ext cx="2567864" cy="1691640"/>
-          </a:xfrm>
-          <a:prstGeom prst="roundRect">
-            <a:avLst>
-              <a:gd name="adj" fmla="val 4324"/>
-            </a:avLst>
+            <a:off x="548640" y="4425696"/>
+            <a:ext cx="566928" cy="566928"/>
+          </a:xfrm>
+          <a:prstGeom prst="ellipse">
+            <a:avLst/>
           </a:prstGeom>
           <a:solidFill>
-            <a:schemeClr val="bg2"/>
+            <a:schemeClr val="accent1"/>
           </a:solidFill>
-          <a:ln w="9525">
+          <a:ln w="6350">
             <a:solidFill>
-              <a:srgbClr val="C4CBD8"/>
+              <a:schemeClr val="accent1"/>
             </a:solidFill>
             <a:prstDash val="solid"/>
           </a:ln>
@@ -13451,14 +13865,14 @@
       </p:sp>
       <p:sp>
         <p:nvSpPr>
-          <p:cNvPr id="15" name="Stat value"/>
+          <p:cNvPr id="15" name="Text 12"/>
           <p:cNvSpPr txBox="1"/>
           <p:nvPr/>
         </p:nvSpPr>
         <p:spPr>
           <a:xfrm>
-            <a:off x="9212351" y="1801368"/>
-            <a:ext cx="2293544" cy="914400"/>
+            <a:off x="548640" y="4425696"/>
+            <a:ext cx="566928" cy="566928"/>
           </a:xfrm>
           <a:prstGeom prst="rect">
             <a:avLst/>
@@ -13474,30 +13888,30 @@
               <a:buNone/>
             </a:pPr>
             <a:r>
-              <a:rPr lang="en-US" sz="2200" b="1" dirty="0">
-                <a:solidFill>
-                  <a:schemeClr val="tx1"/>
-                </a:solidFill>
-                <a:latin typeface="Cambria" pitchFamily="34" charset="0"/>
-                <a:ea typeface="Cambria" pitchFamily="34" charset="-122"/>
-                <a:cs typeface="Cambria" pitchFamily="34" charset="-120"/>
-              </a:rPr>
-              <a:t>AXIOM-05, AXIOM-04</a:t>
-            </a:r>
-            <a:endParaRPr lang="en-US" sz="2200" dirty="0"/>
-          </a:p>
-        </p:txBody>
-      </p:sp>
-      <p:sp>
-        <p:nvSpPr>
-          <p:cNvPr id="16" name="Stat label"/>
+              <a:rPr lang="en-US" sz="1500" b="1" dirty="0">
+                <a:solidFill>
+                  <a:schemeClr val="bg1"/>
+                </a:solidFill>
+                <a:latin typeface="Calibri" pitchFamily="34" charset="0"/>
+                <a:ea typeface="Calibri" pitchFamily="34" charset="-122"/>
+                <a:cs typeface="Calibri" pitchFamily="34" charset="-120"/>
+              </a:rPr>
+              <a:t>4</a:t>
+            </a:r>
+            <a:endParaRPr lang="en-US" sz="1500" dirty="0"/>
+          </a:p>
+        </p:txBody>
+      </p:sp>
+      <p:sp>
+        <p:nvSpPr>
+          <p:cNvPr id="16" name="Row text"/>
           <p:cNvSpPr txBox="1"/>
           <p:nvPr/>
         </p:nvSpPr>
         <p:spPr>
           <a:xfrm>
-            <a:off x="9212351" y="2697480"/>
-            <a:ext cx="2293544" cy="612648"/>
+            <a:off x="1325880" y="4379976"/>
+            <a:ext cx="10317175" cy="841248"/>
           </a:xfrm>
           <a:prstGeom prst="rect">
             <a:avLst/>
@@ -13506,34 +13920,98 @@
           <a:ln/>
         </p:spPr>
         <p:txBody>
-          <a:bodyPr wrap="square" lIns="0" tIns="0" rIns="0" bIns="0" rtlCol="0" anchor="t"/>
+          <a:bodyPr wrap="square" lIns="0" tIns="0" rIns="0" bIns="0" rtlCol="0" anchor="ctr"/>
+          <a:lstStyle/>
+          <a:p>
+            <a:pPr indent="0" marL="0">
+              <a:buNone/>
+            </a:pPr>
+            <a:r>
+              <a:rPr lang="en-US" sz="1500" dirty="0">
+                <a:solidFill>
+                  <a:schemeClr val="tx1"/>
+                </a:solidFill>
+              </a:rPr>
+              <a:t>The terminal value must stand for the value of continuing: without it a plan runs the company down, and an end condition must agree with it.</a:t>
+            </a:r>
+            <a:endParaRPr lang="en-US" sz="1500" dirty="0"/>
+          </a:p>
+        </p:txBody>
+      </p:sp>
+      <p:sp>
+        <p:nvSpPr>
+          <p:cNvPr id="17" name="Number"/>
+          <p:cNvSpPr/>
+          <p:nvPr/>
+        </p:nvSpPr>
+        <p:spPr>
+          <a:xfrm>
+            <a:off x="548640" y="5321808"/>
+            <a:ext cx="566928" cy="566928"/>
+          </a:xfrm>
+          <a:prstGeom prst="ellipse">
+            <a:avLst/>
+          </a:prstGeom>
+          <a:solidFill>
+            <a:schemeClr val="accent1"/>
+          </a:solidFill>
+          <a:ln w="6350">
+            <a:solidFill>
+              <a:schemeClr val="accent1"/>
+            </a:solidFill>
+            <a:prstDash val="solid"/>
+          </a:ln>
+        </p:spPr>
+      </p:sp>
+      <p:sp>
+        <p:nvSpPr>
+          <p:cNvPr id="18" name="Text 15"/>
+          <p:cNvSpPr txBox="1"/>
+          <p:nvPr/>
+        </p:nvSpPr>
+        <p:spPr>
+          <a:xfrm>
+            <a:off x="548640" y="5321808"/>
+            <a:ext cx="566928" cy="566928"/>
+          </a:xfrm>
+          <a:prstGeom prst="rect">
+            <a:avLst/>
+          </a:prstGeom>
+          <a:noFill/>
+          <a:ln/>
+        </p:spPr>
+        <p:txBody>
+          <a:bodyPr wrap="square" lIns="0" tIns="0" rIns="0" bIns="0" rtlCol="0" anchor="ctr"/>
           <a:lstStyle/>
           <a:p>
             <a:pPr algn="ctr" indent="0" marL="0">
               <a:buNone/>
             </a:pPr>
             <a:r>
-              <a:rPr lang="en-US" sz="1400" dirty="0">
-                <a:solidFill>
-                  <a:schemeClr val="tx2"/>
-                </a:solidFill>
-              </a:rPr>
-              <a:t>AXIOM Lab 2.5</a:t>
-            </a:r>
-            <a:endParaRPr lang="en-US" sz="1400" dirty="0"/>
-          </a:p>
-        </p:txBody>
-      </p:sp>
-      <p:sp>
-        <p:nvSpPr>
-          <p:cNvPr id="17" name="Bullets"/>
+              <a:rPr lang="en-US" sz="1500" b="1" dirty="0">
+                <a:solidFill>
+                  <a:schemeClr val="bg1"/>
+                </a:solidFill>
+                <a:latin typeface="Calibri" pitchFamily="34" charset="0"/>
+                <a:ea typeface="Calibri" pitchFamily="34" charset="-122"/>
+                <a:cs typeface="Calibri" pitchFamily="34" charset="-120"/>
+              </a:rPr>
+              <a:t>5</a:t>
+            </a:r>
+            <a:endParaRPr lang="en-US" sz="1500" dirty="0"/>
+          </a:p>
+        </p:txBody>
+      </p:sp>
+      <p:sp>
+        <p:nvSpPr>
+          <p:cNvPr id="19" name="Row text"/>
           <p:cNvSpPr txBox="1"/>
           <p:nvPr/>
         </p:nvSpPr>
         <p:spPr>
           <a:xfrm>
-            <a:off x="548640" y="3703320"/>
-            <a:ext cx="11094415" cy="2468880"/>
+            <a:off x="1325880" y="5276088"/>
+            <a:ext cx="10317175" cy="841248"/>
           </a:xfrm>
           <a:prstGeom prst="rect">
             <a:avLst/>
@@ -13542,77 +14020,21 @@
           <a:ln/>
         </p:spPr>
         <p:txBody>
-          <a:bodyPr wrap="square" lIns="635" tIns="635" rIns="635" bIns="635" rtlCol="0" anchor="t"/>
-          <a:lstStyle/>
-          <a:p>
-            <a:pPr marL="228600" indent="-228600">
-              <a:spcAft>
-                <a:spcPts val="800"/>
-              </a:spcAft>
-              <a:buSzPct val="100000"/>
-              <a:buChar char="•"/>
-            </a:pPr>
-            <a:r>
-              <a:rPr lang="en-US" sz="1700" b="1" dirty="0">
+          <a:bodyPr wrap="square" lIns="0" tIns="0" rIns="0" bIns="0" rtlCol="0" anchor="ctr"/>
+          <a:lstStyle/>
+          <a:p>
+            <a:pPr indent="0" marL="0">
+              <a:buNone/>
+            </a:pPr>
+            <a:r>
+              <a:rPr lang="en-US" sz="1500" dirty="0">
                 <a:solidFill>
                   <a:schemeClr val="tx1"/>
                 </a:solidFill>
               </a:rPr>
-              <a:t>Notebook</a:t>
-            </a:r>
-            <a:r>
-              <a:rPr lang="en-US" sz="1700" dirty="0">
-                <a:solidFill>
-                  <a:schemeClr val="tx1"/>
-                </a:solidFill>
-              </a:rPr>
-              <a:t> DCT_V2_Ch05_Lab.ipynb: Worked Example 5.1 and the lab's five steps in six panels, ready for Colab</a:t>
-            </a:r>
-            <a:endParaRPr lang="en-US" sz="1700" dirty="0"/>
-          </a:p>
-          <a:p>
-            <a:pPr marL="228600" indent="-228600">
-              <a:spcAft>
-                <a:spcPts val="800"/>
-              </a:spcAft>
-              <a:buSzPct val="100000"/>
-              <a:buChar char="•"/>
-            </a:pPr>
-            <a:r>
-              <a:rPr lang="en-US" sz="1700" b="1" dirty="0">
-                <a:solidFill>
-                  <a:schemeClr val="tx1"/>
-                </a:solidFill>
-              </a:rPr>
-              <a:t>Workbook</a:t>
-            </a:r>
-            <a:r>
-              <a:rPr lang="en-US" sz="1700" dirty="0">
-                <a:solidFill>
-                  <a:schemeClr val="tx1"/>
-                </a:solidFill>
-              </a:rPr>
-              <a:t> DCT_V2_Ch05_Lab.xlsx: all 64 schedules with their war chests, the prices, horizons and rates, re-planning and the shortfall, in formulas</a:t>
-            </a:r>
-            <a:endParaRPr lang="en-US" sz="1700" dirty="0"/>
-          </a:p>
-          <a:p>
-            <a:pPr marL="228600" indent="-228600">
-              <a:spcAft>
-                <a:spcPts val="800"/>
-              </a:spcAft>
-              <a:buSzPct val="100000"/>
-              <a:buChar char="•"/>
-            </a:pPr>
-            <a:r>
-              <a:rPr lang="en-US" sz="1700" dirty="0">
-                <a:solidFill>
-                  <a:schemeClr val="tx1"/>
-                </a:solidFill>
-              </a:rPr>
-              <a:t>Every number on these slides is the book's, and both companions check it</a:t>
-            </a:r>
-            <a:endParaRPr lang="en-US" sz="1700" dirty="0"/>
+              <a:t>With exponential discounting re-planning confirms the best plan; present bias and windows without terminal values reverse it (Theorem 5.3); and when the forecast fails, a rule keeps commitments that a schedule breaks.</a:t>
+            </a:r>
+            <a:endParaRPr lang="en-US" sz="1500" dirty="0"/>
           </a:p>
         </p:txBody>
       </p:sp>
@@ -13718,6 +14140,655 @@
                   <a:schemeClr val="accent1"/>
                 </a:solidFill>
               </a:rPr>
+              <a:t>THIS WEEK'S LABORATORY</a:t>
+            </a:r>
+            <a:endParaRPr lang="en-US" sz="1200" dirty="0"/>
+          </a:p>
+        </p:txBody>
+      </p:sp>
+      <p:sp>
+        <p:nvSpPr>
+          <p:cNvPr id="4" name="Text 1"/>
+          <p:cNvSpPr/>
+          <p:nvPr>
+            <p:ph idx="103" type="title" hasCustomPrompt="1"/>
+          </p:nvPr>
+        </p:nvSpPr>
+        <p:spPr>
+          <a:xfrm>
+            <a:off x="548640" y="658368"/>
+            <a:ext cx="11094415" cy="868680"/>
+          </a:xfrm>
+          <a:prstGeom prst="rect">
+            <a:avLst/>
+          </a:prstGeom>
+          <a:noFill/>
+          <a:ln/>
+        </p:spPr>
+        <p:txBody>
+          <a:bodyPr wrap="square" lIns="0" tIns="0" rIns="0" bIns="0" rtlCol="0" anchor="t"/>
+          <a:lstStyle/>
+          <a:p>
+            <a:pPr algn="l" indent="0" marL="0">
+              <a:buNone/>
+            </a:pPr>
+            <a:r>
+              <a:rPr lang="en-US" sz="3200" b="1" dirty="0">
+                <a:solidFill>
+                  <a:schemeClr val="tx1"/>
+                </a:solidFill>
+                <a:latin typeface="Cambria" pitchFamily="34" charset="0"/>
+                <a:ea typeface="Cambria" pitchFamily="34" charset="-122"/>
+                <a:cs typeface="Cambria" pitchFamily="34" charset="-120"/>
+              </a:rPr>
+              <a:t>Notebook and workbook reproduce the book</a:t>
+            </a:r>
+            <a:endParaRPr lang="en-US" sz="3200" dirty="0"/>
+          </a:p>
+        </p:txBody>
+      </p:sp>
+      <p:sp>
+        <p:nvSpPr>
+          <p:cNvPr id="5" name="Stat card"/>
+          <p:cNvSpPr/>
+          <p:nvPr/>
+        </p:nvSpPr>
+        <p:spPr>
+          <a:xfrm>
+            <a:off x="548640" y="1691640"/>
+            <a:ext cx="2567864" cy="1691640"/>
+          </a:xfrm>
+          <a:prstGeom prst="roundRect">
+            <a:avLst>
+              <a:gd name="adj" fmla="val 4324"/>
+            </a:avLst>
+          </a:prstGeom>
+          <a:solidFill>
+            <a:schemeClr val="tx1"/>
+          </a:solidFill>
+          <a:ln w="9525">
+            <a:solidFill>
+              <a:srgbClr val="0F1E3D"/>
+            </a:solidFill>
+            <a:prstDash val="solid"/>
+          </a:ln>
+        </p:spPr>
+      </p:sp>
+      <p:sp>
+        <p:nvSpPr>
+          <p:cNvPr id="6" name="Stat value"/>
+          <p:cNvSpPr txBox="1"/>
+          <p:nvPr/>
+        </p:nvSpPr>
+        <p:spPr>
+          <a:xfrm>
+            <a:off x="685800" y="1801368"/>
+            <a:ext cx="2293544" cy="914400"/>
+          </a:xfrm>
+          <a:prstGeom prst="rect">
+            <a:avLst/>
+          </a:prstGeom>
+          <a:noFill/>
+          <a:ln/>
+        </p:spPr>
+        <p:txBody>
+          <a:bodyPr wrap="square" lIns="0" tIns="0" rIns="0" bIns="0" rtlCol="0" anchor="ctr"/>
+          <a:lstStyle/>
+          <a:p>
+            <a:pPr algn="ctr" indent="0" marL="0">
+              <a:buNone/>
+            </a:pPr>
+            <a:r>
+              <a:rPr lang="en-US" sz="4400" b="1" dirty="0">
+                <a:solidFill>
+                  <a:schemeClr val="accent1"/>
+                </a:solidFill>
+                <a:latin typeface="Cambria" pitchFamily="34" charset="0"/>
+                <a:ea typeface="Cambria" pitchFamily="34" charset="-122"/>
+                <a:cs typeface="Cambria" pitchFamily="34" charset="-120"/>
+              </a:rPr>
+              <a:t>36</a:t>
+            </a:r>
+            <a:endParaRPr lang="en-US" sz="4400" dirty="0"/>
+          </a:p>
+        </p:txBody>
+      </p:sp>
+      <p:sp>
+        <p:nvSpPr>
+          <p:cNvPr id="7" name="Stat label"/>
+          <p:cNvSpPr txBox="1"/>
+          <p:nvPr/>
+        </p:nvSpPr>
+        <p:spPr>
+          <a:xfrm>
+            <a:off x="685800" y="2697480"/>
+            <a:ext cx="2293544" cy="612648"/>
+          </a:xfrm>
+          <a:prstGeom prst="rect">
+            <a:avLst/>
+          </a:prstGeom>
+          <a:noFill/>
+          <a:ln/>
+        </p:spPr>
+        <p:txBody>
+          <a:bodyPr wrap="square" lIns="0" tIns="0" rIns="0" bIns="0" rtlCol="0" anchor="t"/>
+          <a:lstStyle/>
+          <a:p>
+            <a:pPr algn="ctr" indent="0" marL="0">
+              <a:buNone/>
+            </a:pPr>
+            <a:r>
+              <a:rPr lang="en-US" sz="1400" dirty="0">
+                <a:solidFill>
+                  <a:schemeClr val="bg2"/>
+                </a:solidFill>
+              </a:rPr>
+              <a:t>notebook checkpoints, every one PASS</a:t>
+            </a:r>
+            <a:endParaRPr lang="en-US" sz="1400" dirty="0"/>
+          </a:p>
+        </p:txBody>
+      </p:sp>
+      <p:sp>
+        <p:nvSpPr>
+          <p:cNvPr id="8" name="Stat card"/>
+          <p:cNvSpPr/>
+          <p:nvPr/>
+        </p:nvSpPr>
+        <p:spPr>
+          <a:xfrm>
+            <a:off x="3390824" y="1691640"/>
+            <a:ext cx="2567864" cy="1691640"/>
+          </a:xfrm>
+          <a:prstGeom prst="roundRect">
+            <a:avLst>
+              <a:gd name="adj" fmla="val 4324"/>
+            </a:avLst>
+          </a:prstGeom>
+          <a:solidFill>
+            <a:schemeClr val="bg2"/>
+          </a:solidFill>
+          <a:ln w="9525">
+            <a:solidFill>
+              <a:srgbClr val="C4CBD8"/>
+            </a:solidFill>
+            <a:prstDash val="solid"/>
+          </a:ln>
+        </p:spPr>
+      </p:sp>
+      <p:sp>
+        <p:nvSpPr>
+          <p:cNvPr id="9" name="Stat value"/>
+          <p:cNvSpPr txBox="1"/>
+          <p:nvPr/>
+        </p:nvSpPr>
+        <p:spPr>
+          <a:xfrm>
+            <a:off x="3527984" y="1801368"/>
+            <a:ext cx="2293544" cy="914400"/>
+          </a:xfrm>
+          <a:prstGeom prst="rect">
+            <a:avLst/>
+          </a:prstGeom>
+          <a:noFill/>
+          <a:ln/>
+        </p:spPr>
+        <p:txBody>
+          <a:bodyPr wrap="square" lIns="0" tIns="0" rIns="0" bIns="0" rtlCol="0" anchor="ctr"/>
+          <a:lstStyle/>
+          <a:p>
+            <a:pPr algn="ctr" indent="0" marL="0">
+              <a:buNone/>
+            </a:pPr>
+            <a:r>
+              <a:rPr lang="en-US" sz="4400" b="1" dirty="0">
+                <a:solidFill>
+                  <a:schemeClr val="tx1"/>
+                </a:solidFill>
+                <a:latin typeface="Cambria" pitchFamily="34" charset="0"/>
+                <a:ea typeface="Cambria" pitchFamily="34" charset="-122"/>
+                <a:cs typeface="Cambria" pitchFamily="34" charset="-120"/>
+              </a:rPr>
+              <a:t>46</a:t>
+            </a:r>
+            <a:endParaRPr lang="en-US" sz="4400" dirty="0"/>
+          </a:p>
+        </p:txBody>
+      </p:sp>
+      <p:sp>
+        <p:nvSpPr>
+          <p:cNvPr id="10" name="Stat label"/>
+          <p:cNvSpPr txBox="1"/>
+          <p:nvPr/>
+        </p:nvSpPr>
+        <p:spPr>
+          <a:xfrm>
+            <a:off x="3527984" y="2697480"/>
+            <a:ext cx="2293544" cy="612648"/>
+          </a:xfrm>
+          <a:prstGeom prst="rect">
+            <a:avLst/>
+          </a:prstGeom>
+          <a:noFill/>
+          <a:ln/>
+        </p:spPr>
+        <p:txBody>
+          <a:bodyPr wrap="square" lIns="0" tIns="0" rIns="0" bIns="0" rtlCol="0" anchor="t"/>
+          <a:lstStyle/>
+          <a:p>
+            <a:pPr algn="ctr" indent="0" marL="0">
+              <a:buNone/>
+            </a:pPr>
+            <a:r>
+              <a:rPr lang="en-US" sz="1400" dirty="0">
+                <a:solidFill>
+                  <a:schemeClr val="tx2"/>
+                </a:solidFill>
+              </a:rPr>
+              <a:t>workbook checks against the engine, ALL PASS</a:t>
+            </a:r>
+            <a:endParaRPr lang="en-US" sz="1400" dirty="0"/>
+          </a:p>
+        </p:txBody>
+      </p:sp>
+      <p:sp>
+        <p:nvSpPr>
+          <p:cNvPr id="11" name="Stat card"/>
+          <p:cNvSpPr/>
+          <p:nvPr/>
+        </p:nvSpPr>
+        <p:spPr>
+          <a:xfrm>
+            <a:off x="6233008" y="1691640"/>
+            <a:ext cx="2567864" cy="1691640"/>
+          </a:xfrm>
+          <a:prstGeom prst="roundRect">
+            <a:avLst>
+              <a:gd name="adj" fmla="val 4324"/>
+            </a:avLst>
+          </a:prstGeom>
+          <a:solidFill>
+            <a:schemeClr val="bg2"/>
+          </a:solidFill>
+          <a:ln w="9525">
+            <a:solidFill>
+              <a:srgbClr val="C4CBD8"/>
+            </a:solidFill>
+            <a:prstDash val="solid"/>
+          </a:ln>
+        </p:spPr>
+      </p:sp>
+      <p:sp>
+        <p:nvSpPr>
+          <p:cNvPr id="12" name="Stat value"/>
+          <p:cNvSpPr txBox="1"/>
+          <p:nvPr/>
+        </p:nvSpPr>
+        <p:spPr>
+          <a:xfrm>
+            <a:off x="6370168" y="1801368"/>
+            <a:ext cx="2293544" cy="914400"/>
+          </a:xfrm>
+          <a:prstGeom prst="rect">
+            <a:avLst/>
+          </a:prstGeom>
+          <a:noFill/>
+          <a:ln/>
+        </p:spPr>
+        <p:txBody>
+          <a:bodyPr wrap="square" lIns="0" tIns="0" rIns="0" bIns="0" rtlCol="0" anchor="ctr"/>
+          <a:lstStyle/>
+          <a:p>
+            <a:pPr algn="ctr" indent="0" marL="0">
+              <a:buNone/>
+            </a:pPr>
+            <a:r>
+              <a:rPr lang="en-US" sz="4400" b="1" dirty="0">
+                <a:solidFill>
+                  <a:schemeClr val="tx1"/>
+                </a:solidFill>
+                <a:latin typeface="Cambria" pitchFamily="34" charset="0"/>
+                <a:ea typeface="Cambria" pitchFamily="34" charset="-122"/>
+                <a:cs typeface="Cambria" pitchFamily="34" charset="-120"/>
+              </a:rPr>
+              <a:t>26205</a:t>
+            </a:r>
+            <a:endParaRPr lang="en-US" sz="4400" dirty="0"/>
+          </a:p>
+        </p:txBody>
+      </p:sp>
+      <p:sp>
+        <p:nvSpPr>
+          <p:cNvPr id="13" name="Stat label"/>
+          <p:cNvSpPr txBox="1"/>
+          <p:nvPr/>
+        </p:nvSpPr>
+        <p:spPr>
+          <a:xfrm>
+            <a:off x="6370168" y="2697480"/>
+            <a:ext cx="2293544" cy="612648"/>
+          </a:xfrm>
+          <a:prstGeom prst="rect">
+            <a:avLst/>
+          </a:prstGeom>
+          <a:noFill/>
+          <a:ln/>
+        </p:spPr>
+        <p:txBody>
+          <a:bodyPr wrap="square" lIns="0" tIns="0" rIns="0" bIns="0" rtlCol="0" anchor="t"/>
+          <a:lstStyle/>
+          <a:p>
+            <a:pPr algn="ctr" indent="0" marL="0">
+              <a:buNone/>
+            </a:pPr>
+            <a:r>
+              <a:rPr lang="en-US" sz="1400" dirty="0">
+                <a:solidFill>
+                  <a:schemeClr val="tx2"/>
+                </a:solidFill>
+              </a:rPr>
+              <a:t>the lab's seed</a:t>
+            </a:r>
+            <a:endParaRPr lang="en-US" sz="1400" dirty="0"/>
+          </a:p>
+        </p:txBody>
+      </p:sp>
+      <p:sp>
+        <p:nvSpPr>
+          <p:cNvPr id="14" name="Stat card"/>
+          <p:cNvSpPr/>
+          <p:nvPr/>
+        </p:nvSpPr>
+        <p:spPr>
+          <a:xfrm>
+            <a:off x="9075191" y="1691640"/>
+            <a:ext cx="2567864" cy="1691640"/>
+          </a:xfrm>
+          <a:prstGeom prst="roundRect">
+            <a:avLst>
+              <a:gd name="adj" fmla="val 4324"/>
+            </a:avLst>
+          </a:prstGeom>
+          <a:solidFill>
+            <a:schemeClr val="bg2"/>
+          </a:solidFill>
+          <a:ln w="9525">
+            <a:solidFill>
+              <a:srgbClr val="C4CBD8"/>
+            </a:solidFill>
+            <a:prstDash val="solid"/>
+          </a:ln>
+        </p:spPr>
+      </p:sp>
+      <p:sp>
+        <p:nvSpPr>
+          <p:cNvPr id="15" name="Stat value"/>
+          <p:cNvSpPr txBox="1"/>
+          <p:nvPr/>
+        </p:nvSpPr>
+        <p:spPr>
+          <a:xfrm>
+            <a:off x="9212351" y="1801368"/>
+            <a:ext cx="2293544" cy="914400"/>
+          </a:xfrm>
+          <a:prstGeom prst="rect">
+            <a:avLst/>
+          </a:prstGeom>
+          <a:noFill/>
+          <a:ln/>
+        </p:spPr>
+        <p:txBody>
+          <a:bodyPr wrap="square" lIns="0" tIns="0" rIns="0" bIns="0" rtlCol="0" anchor="ctr"/>
+          <a:lstStyle/>
+          <a:p>
+            <a:pPr algn="ctr" indent="0" marL="0">
+              <a:buNone/>
+            </a:pPr>
+            <a:r>
+              <a:rPr lang="en-US" sz="2200" b="1" dirty="0">
+                <a:solidFill>
+                  <a:schemeClr val="tx1"/>
+                </a:solidFill>
+                <a:latin typeface="Cambria" pitchFamily="34" charset="0"/>
+                <a:ea typeface="Cambria" pitchFamily="34" charset="-122"/>
+                <a:cs typeface="Cambria" pitchFamily="34" charset="-120"/>
+              </a:rPr>
+              <a:t>AXIOM-05, AXIOM-04</a:t>
+            </a:r>
+            <a:endParaRPr lang="en-US" sz="2200" dirty="0"/>
+          </a:p>
+        </p:txBody>
+      </p:sp>
+      <p:sp>
+        <p:nvSpPr>
+          <p:cNvPr id="16" name="Stat label"/>
+          <p:cNvSpPr txBox="1"/>
+          <p:nvPr/>
+        </p:nvSpPr>
+        <p:spPr>
+          <a:xfrm>
+            <a:off x="9212351" y="2697480"/>
+            <a:ext cx="2293544" cy="612648"/>
+          </a:xfrm>
+          <a:prstGeom prst="rect">
+            <a:avLst/>
+          </a:prstGeom>
+          <a:noFill/>
+          <a:ln/>
+        </p:spPr>
+        <p:txBody>
+          <a:bodyPr wrap="square" lIns="0" tIns="0" rIns="0" bIns="0" rtlCol="0" anchor="t"/>
+          <a:lstStyle/>
+          <a:p>
+            <a:pPr algn="ctr" indent="0" marL="0">
+              <a:buNone/>
+            </a:pPr>
+            <a:r>
+              <a:rPr lang="en-US" sz="1400" dirty="0">
+                <a:solidFill>
+                  <a:schemeClr val="tx2"/>
+                </a:solidFill>
+              </a:rPr>
+              <a:t>AXIOM Lab 2.5</a:t>
+            </a:r>
+            <a:endParaRPr lang="en-US" sz="1400" dirty="0"/>
+          </a:p>
+        </p:txBody>
+      </p:sp>
+      <p:sp>
+        <p:nvSpPr>
+          <p:cNvPr id="17" name="Bullets"/>
+          <p:cNvSpPr txBox="1"/>
+          <p:nvPr/>
+        </p:nvSpPr>
+        <p:spPr>
+          <a:xfrm>
+            <a:off x="548640" y="3703320"/>
+            <a:ext cx="11094415" cy="2468880"/>
+          </a:xfrm>
+          <a:prstGeom prst="rect">
+            <a:avLst/>
+          </a:prstGeom>
+          <a:noFill/>
+          <a:ln/>
+        </p:spPr>
+        <p:txBody>
+          <a:bodyPr wrap="square" lIns="635" tIns="635" rIns="635" bIns="635" rtlCol="0" anchor="t"/>
+          <a:lstStyle/>
+          <a:p>
+            <a:pPr marL="228600" indent="-228600">
+              <a:spcAft>
+                <a:spcPts val="800"/>
+              </a:spcAft>
+              <a:buSzPct val="100000"/>
+              <a:buChar char="•"/>
+            </a:pPr>
+            <a:r>
+              <a:rPr lang="en-US" sz="1700" b="1" dirty="0">
+                <a:solidFill>
+                  <a:schemeClr val="tx1"/>
+                </a:solidFill>
+              </a:rPr>
+              <a:t>Notebook</a:t>
+            </a:r>
+            <a:r>
+              <a:rPr lang="en-US" sz="1700" dirty="0">
+                <a:solidFill>
+                  <a:schemeClr val="tx1"/>
+                </a:solidFill>
+              </a:rPr>
+              <a:t> DCT_V2_Ch05_Lab.ipynb: Worked Example 5.1 and the lab's five steps in six panels, ready for Colab</a:t>
+            </a:r>
+            <a:endParaRPr lang="en-US" sz="1700" dirty="0"/>
+          </a:p>
+          <a:p>
+            <a:pPr marL="228600" indent="-228600">
+              <a:spcAft>
+                <a:spcPts val="800"/>
+              </a:spcAft>
+              <a:buSzPct val="100000"/>
+              <a:buChar char="•"/>
+            </a:pPr>
+            <a:r>
+              <a:rPr lang="en-US" sz="1700" b="1" dirty="0">
+                <a:solidFill>
+                  <a:schemeClr val="tx1"/>
+                </a:solidFill>
+              </a:rPr>
+              <a:t>Workbook</a:t>
+            </a:r>
+            <a:r>
+              <a:rPr lang="en-US" sz="1700" dirty="0">
+                <a:solidFill>
+                  <a:schemeClr val="tx1"/>
+                </a:solidFill>
+              </a:rPr>
+              <a:t> DCT_V2_Ch05_Lab.xlsx: all 64 schedules with their war chests, the prices, horizons and rates, re-planning and the shortfall, in formulas</a:t>
+            </a:r>
+            <a:endParaRPr lang="en-US" sz="1700" dirty="0"/>
+          </a:p>
+          <a:p>
+            <a:pPr marL="228600" indent="-228600">
+              <a:spcAft>
+                <a:spcPts val="800"/>
+              </a:spcAft>
+              <a:buSzPct val="100000"/>
+              <a:buChar char="•"/>
+            </a:pPr>
+            <a:r>
+              <a:rPr lang="en-US" sz="1700" dirty="0">
+                <a:solidFill>
+                  <a:schemeClr val="tx1"/>
+                </a:solidFill>
+              </a:rPr>
+              <a:t>Every number on these slides is the book's, and both companions check it</a:t>
+            </a:r>
+            <a:endParaRPr lang="en-US" sz="1700" dirty="0"/>
+          </a:p>
+        </p:txBody>
+      </p:sp>
+      <p:sp>
+        <p:nvSpPr>
+          <p:cNvPr id="25" name="Slide Number Placeholder 0"/>
+          <p:cNvSpPr>
+            <a:spLocks noGrp="1"/>
+          </p:cNvSpPr>
+          <p:nvPr>
+            <p:ph type="sldNum" sz="quarter" idx="4294967295"/>
+          </p:nvPr>
+        </p:nvSpPr>
+        <p:spPr>
+          <a:xfrm>
+            <a:off x="11094415" y="6382512"/>
+            <a:ext cx="548640" cy="237744"/>
+          </a:xfrm>
+          <a:prstGeom prst="rect">
+            <a:avLst/>
+          </a:prstGeom>
+          <a:extLst>
+            <a:ext uri="{C572A759-6A51-4108-AA02-DFA0A04FC94B}">
+              <ma14:wrappingTextBoxFlag xmlns:ma14="http://schemas.microsoft.com/office/mac/drawingml/2011/main" val="0"/>
+            </a:ext>
+          </a:extLst>
+        </p:spPr>
+        <p:txBody>
+          <a:bodyPr/>
+          <a:lstStyle>
+            <a:lvl1pPr>
+              <a:defRPr sz="1000">
+                <a:solidFill>
+                  <a:srgbClr val="5A6B82"/>
+                </a:solidFill>
+              </a:defRPr>
+            </a:lvl1pPr>
+          </a:lstStyle>
+          <a:p>
+            <a:pPr algn="r"/>
+            <a:fld id="{F7021451-1387-4CA6-816F-3879F97B5CBC}" type="slidenum">
+              <a:rPr b="0" lang="en-US"/>
+              <a:t>24</a:t>
+            </a:fld>
+            <a:endParaRPr lang="en-US"/>
+          </a:p>
+        </p:txBody>
+      </p:sp>
+    </p:spTree>
+  </p:cSld>
+  <p:clrMapOvr>
+    <a:masterClrMapping/>
+  </p:clrMapOvr>
+</p:sld>
+</file>
+
+<file path=ppt/slides/slide25.xml><?xml version="1.0" encoding="utf-8"?>
+<p:sld xmlns:a="http://schemas.openxmlformats.org/drawingml/2006/main" xmlns:r="http://schemas.openxmlformats.org/officeDocument/2006/relationships" xmlns:p="http://schemas.openxmlformats.org/presentationml/2006/main">
+  <p:cSld name="Slide 25">
+    <p:spTree>
+      <p:nvGrpSpPr>
+        <p:cNvPr id="1" name=""/>
+        <p:cNvGrpSpPr/>
+        <p:nvPr/>
+      </p:nvGrpSpPr>
+      <p:grpSpPr>
+        <a:xfrm>
+          <a:off x="0" y="0"/>
+          <a:ext cx="0" cy="0"/>
+          <a:chOff x="0" y="0"/>
+          <a:chExt cx="0" cy="0"/>
+        </a:xfrm>
+      </p:grpSpPr>
+      <p:sp>
+        <p:nvSpPr>
+          <p:cNvPr id="3" name="Text 1"/>
+          <p:cNvSpPr/>
+          <p:nvPr>
+            <p:ph idx="102" type="body" hasCustomPrompt="1"/>
+          </p:nvPr>
+        </p:nvSpPr>
+        <p:spPr>
+          <a:xfrm>
+            <a:off x="548640" y="347472"/>
+            <a:ext cx="11094415" cy="292608"/>
+          </a:xfrm>
+          <a:prstGeom prst="rect">
+            <a:avLst/>
+          </a:prstGeom>
+          <a:noFill/>
+          <a:ln/>
+        </p:spPr>
+        <p:txBody>
+          <a:bodyPr wrap="square" lIns="0" tIns="0" rIns="0" bIns="0" rtlCol="0"/>
+          <a:lstStyle/>
+          <a:p>
+            <a:pPr indent="0" marL="0">
+              <a:buNone/>
+            </a:pPr>
+            <a:r>
+              <a:rPr lang="en-US" sz="1200" b="1" spc="200" kern="0" dirty="0">
+                <a:solidFill>
+                  <a:schemeClr val="accent1"/>
+                </a:solidFill>
+              </a:rPr>
               <a:t>NEXT · CHAPTER 6</a:t>
             </a:r>
             <a:endParaRPr lang="en-US" sz="1200" dirty="0"/>
@@ -13904,7 +14975,7 @@
             <a:pPr algn="r"/>
             <a:fld id="{F7021451-1387-4CA6-816F-3879F97B5CBC}" type="slidenum">
               <a:rPr b="0" lang="en-US"/>
-              <a:t>24</a:t>
+              <a:t>25</a:t>
             </a:fld>
             <a:endParaRPr lang="en-US"/>
           </a:p>
@@ -14657,7 +15728,7 @@
                 <a:ea typeface="Cambria" pitchFamily="34" charset="-122"/>
                 <a:cs typeface="Cambria" pitchFamily="34" charset="-120"/>
               </a:rPr>
-              <a:t>Six sections, a worked example and a lab</a:t>
+              <a:t>Six sections, a worked example, a case and a lab</a:t>
             </a:r>
             <a:endParaRPr lang="en-US" sz="3200" dirty="0"/>
           </a:p>
@@ -14672,11 +15743,11 @@
         <p:spPr>
           <a:xfrm>
             <a:off x="548640" y="1691640"/>
-            <a:ext cx="2567864" cy="2103120"/>
+            <a:ext cx="1999427" cy="2103120"/>
           </a:xfrm>
           <a:prstGeom prst="roundRect">
             <a:avLst>
-              <a:gd name="adj" fmla="val 3478"/>
+              <a:gd name="adj" fmla="val 3659"/>
             </a:avLst>
           </a:prstGeom>
           <a:solidFill>
@@ -14699,7 +15770,7 @@
         <p:spPr>
           <a:xfrm>
             <a:off x="731520" y="1819656"/>
-            <a:ext cx="2202104" cy="310896"/>
+            <a:ext cx="1633667" cy="310896"/>
           </a:xfrm>
           <a:prstGeom prst="rect">
             <a:avLst/>
@@ -14735,7 +15806,7 @@
         <p:spPr>
           <a:xfrm>
             <a:off x="731520" y="2148840"/>
-            <a:ext cx="2202104" cy="1060704"/>
+            <a:ext cx="1633667" cy="1060704"/>
           </a:xfrm>
           <a:prstGeom prst="rect">
             <a:avLst/>
@@ -14751,7 +15822,7 @@
               <a:buNone/>
             </a:pPr>
             <a:r>
-              <a:rPr lang="en-US" sz="1500" b="1" dirty="0">
+              <a:rPr lang="en-US" sz="1300" b="1" dirty="0">
                 <a:solidFill>
                   <a:schemeClr val="tx1"/>
                 </a:solidFill>
@@ -14761,7 +15832,7 @@
               </a:rPr>
               <a:t>What Time Adds</a:t>
             </a:r>
-            <a:endParaRPr lang="en-US" sz="1500" dirty="0"/>
+            <a:endParaRPr lang="en-US" sz="1300" dirty="0"/>
           </a:p>
         </p:txBody>
       </p:sp>
@@ -14774,7 +15845,7 @@
         <p:spPr>
           <a:xfrm>
             <a:off x="731520" y="3282696"/>
-            <a:ext cx="2202104" cy="384048"/>
+            <a:ext cx="1633667" cy="384048"/>
           </a:xfrm>
           <a:prstGeom prst="rect">
             <a:avLst/>
@@ -14790,14 +15861,14 @@
               <a:buNone/>
             </a:pPr>
             <a:r>
-              <a:rPr lang="en-US" sz="1300" dirty="0">
+              <a:rPr lang="en-US" sz="1200" dirty="0">
                 <a:solidFill>
                   <a:schemeClr val="tx2"/>
                 </a:solidFill>
               </a:rPr>
               <a:t>Proposition 5.1 · Table 5.1</a:t>
             </a:r>
-            <a:endParaRPr lang="en-US" sz="1300" dirty="0"/>
+            <a:endParaRPr lang="en-US" sz="1200" dirty="0"/>
           </a:p>
         </p:txBody>
       </p:sp>
@@ -14809,12 +15880,12 @@
         </p:nvSpPr>
         <p:spPr>
           <a:xfrm>
-            <a:off x="3390824" y="1691640"/>
-            <a:ext cx="2567864" cy="2103120"/>
+            <a:off x="2822387" y="1691640"/>
+            <a:ext cx="1999427" cy="2103120"/>
           </a:xfrm>
           <a:prstGeom prst="roundRect">
             <a:avLst>
-              <a:gd name="adj" fmla="val 3478"/>
+              <a:gd name="adj" fmla="val 3659"/>
             </a:avLst>
           </a:prstGeom>
           <a:solidFill>
@@ -14836,8 +15907,8 @@
         </p:nvSpPr>
         <p:spPr>
           <a:xfrm>
-            <a:off x="3573704" y="1819656"/>
-            <a:ext cx="2202104" cy="310896"/>
+            <a:off x="3005267" y="1819656"/>
+            <a:ext cx="1633667" cy="310896"/>
           </a:xfrm>
           <a:prstGeom prst="rect">
             <a:avLst/>
@@ -14872,8 +15943,8 @@
         </p:nvSpPr>
         <p:spPr>
           <a:xfrm>
-            <a:off x="3573704" y="2148840"/>
-            <a:ext cx="2202104" cy="1060704"/>
+            <a:off x="3005267" y="2148840"/>
+            <a:ext cx="1633667" cy="1060704"/>
           </a:xfrm>
           <a:prstGeom prst="rect">
             <a:avLst/>
@@ -14889,7 +15960,7 @@
               <a:buNone/>
             </a:pPr>
             <a:r>
-              <a:rPr lang="en-US" sz="1500" b="1" dirty="0">
+              <a:rPr lang="en-US" sz="1300" b="1" dirty="0">
                 <a:solidFill>
                   <a:schemeClr val="tx1"/>
                 </a:solidFill>
@@ -14899,7 +15970,7 @@
               </a:rPr>
               <a:t>Dynamic Instances</a:t>
             </a:r>
-            <a:endParaRPr lang="en-US" sz="1500" dirty="0"/>
+            <a:endParaRPr lang="en-US" sz="1300" dirty="0"/>
           </a:p>
         </p:txBody>
       </p:sp>
@@ -14911,8 +15982,8 @@
         </p:nvSpPr>
         <p:spPr>
           <a:xfrm>
-            <a:off x="3573704" y="3282696"/>
-            <a:ext cx="2202104" cy="384048"/>
+            <a:off x="3005267" y="3282696"/>
+            <a:ext cx="1633667" cy="384048"/>
           </a:xfrm>
           <a:prstGeom prst="rect">
             <a:avLst/>
@@ -14928,14 +15999,14 @@
               <a:buNone/>
             </a:pPr>
             <a:r>
-              <a:rPr lang="en-US" sz="1300" dirty="0">
+              <a:rPr lang="en-US" sz="1200" dirty="0">
                 <a:solidFill>
                   <a:schemeClr val="tx2"/>
                 </a:solidFill>
               </a:rPr>
               <a:t>Definition 5.1 · Proposition 5.2</a:t>
             </a:r>
-            <a:endParaRPr lang="en-US" sz="1300" dirty="0"/>
+            <a:endParaRPr lang="en-US" sz="1200" dirty="0"/>
           </a:p>
         </p:txBody>
       </p:sp>
@@ -14947,12 +16018,12 @@
         </p:nvSpPr>
         <p:spPr>
           <a:xfrm>
-            <a:off x="6233008" y="1691640"/>
-            <a:ext cx="2567864" cy="2103120"/>
+            <a:off x="5096134" y="1691640"/>
+            <a:ext cx="1999427" cy="2103120"/>
           </a:xfrm>
           <a:prstGeom prst="roundRect">
             <a:avLst>
-              <a:gd name="adj" fmla="val 3478"/>
+              <a:gd name="adj" fmla="val 3659"/>
             </a:avLst>
           </a:prstGeom>
           <a:solidFill>
@@ -14974,8 +16045,8 @@
         </p:nvSpPr>
         <p:spPr>
           <a:xfrm>
-            <a:off x="6415888" y="1819656"/>
-            <a:ext cx="2202104" cy="310896"/>
+            <a:off x="5279014" y="1819656"/>
+            <a:ext cx="1633667" cy="310896"/>
           </a:xfrm>
           <a:prstGeom prst="rect">
             <a:avLst/>
@@ -15010,8 +16081,8 @@
         </p:nvSpPr>
         <p:spPr>
           <a:xfrm>
-            <a:off x="6415888" y="2148840"/>
-            <a:ext cx="2202104" cy="1060704"/>
+            <a:off x="5279014" y="2148840"/>
+            <a:ext cx="1633667" cy="1060704"/>
           </a:xfrm>
           <a:prstGeom prst="rect">
             <a:avLst/>
@@ -15027,7 +16098,7 @@
               <a:buNone/>
             </a:pPr>
             <a:r>
-              <a:rPr lang="en-US" sz="1500" b="1" dirty="0">
+              <a:rPr lang="en-US" sz="1300" b="1" dirty="0">
                 <a:solidFill>
                   <a:schemeClr val="tx1"/>
                 </a:solidFill>
@@ -15037,7 +16108,7 @@
               </a:rPr>
               <a:t>Transcription: From Paths to Programs</a:t>
             </a:r>
-            <a:endParaRPr lang="en-US" sz="1500" dirty="0"/>
+            <a:endParaRPr lang="en-US" sz="1300" dirty="0"/>
           </a:p>
         </p:txBody>
       </p:sp>
@@ -15049,8 +16120,8 @@
         </p:nvSpPr>
         <p:spPr>
           <a:xfrm>
-            <a:off x="6415888" y="3282696"/>
-            <a:ext cx="2202104" cy="384048"/>
+            <a:off x="5279014" y="3282696"/>
+            <a:ext cx="1633667" cy="384048"/>
           </a:xfrm>
           <a:prstGeom prst="rect">
             <a:avLst/>
@@ -15066,14 +16137,14 @@
               <a:buNone/>
             </a:pPr>
             <a:r>
-              <a:rPr lang="en-US" sz="1300" dirty="0">
+              <a:rPr lang="en-US" sz="1200" dirty="0">
                 <a:solidFill>
                   <a:schemeClr val="tx2"/>
                 </a:solidFill>
               </a:rPr>
               <a:t>Theorem 5.1 · Figure 5.1</a:t>
             </a:r>
-            <a:endParaRPr lang="en-US" sz="1300" dirty="0"/>
+            <a:endParaRPr lang="en-US" sz="1200" dirty="0"/>
           </a:p>
         </p:txBody>
       </p:sp>
@@ -15085,12 +16156,12 @@
         </p:nvSpPr>
         <p:spPr>
           <a:xfrm>
-            <a:off x="9075191" y="1691640"/>
-            <a:ext cx="2567864" cy="2103120"/>
+            <a:off x="7369881" y="1691640"/>
+            <a:ext cx="1999427" cy="2103120"/>
           </a:xfrm>
           <a:prstGeom prst="roundRect">
             <a:avLst>
-              <a:gd name="adj" fmla="val 3478"/>
+              <a:gd name="adj" fmla="val 3659"/>
             </a:avLst>
           </a:prstGeom>
           <a:solidFill>
@@ -15112,8 +16183,8 @@
         </p:nvSpPr>
         <p:spPr>
           <a:xfrm>
-            <a:off x="9258071" y="1819656"/>
-            <a:ext cx="2202104" cy="310896"/>
+            <a:off x="7552761" y="1819656"/>
+            <a:ext cx="1633667" cy="310896"/>
           </a:xfrm>
           <a:prstGeom prst="rect">
             <a:avLst/>
@@ -15148,8 +16219,8 @@
         </p:nvSpPr>
         <p:spPr>
           <a:xfrm>
-            <a:off x="9258071" y="2148840"/>
-            <a:ext cx="2202104" cy="1060704"/>
+            <a:off x="7552761" y="2148840"/>
+            <a:ext cx="1633667" cy="1060704"/>
           </a:xfrm>
           <a:prstGeom prst="rect">
             <a:avLst/>
@@ -15165,7 +16236,7 @@
               <a:buNone/>
             </a:pPr>
             <a:r>
-              <a:rPr lang="en-US" sz="1500" b="1" dirty="0">
+              <a:rPr lang="en-US" sz="1300" b="1" dirty="0">
                 <a:solidFill>
                   <a:schemeClr val="tx1"/>
                 </a:solidFill>
@@ -15175,7 +16246,7 @@
               </a:rPr>
               <a:t>Prices over Time</a:t>
             </a:r>
-            <a:endParaRPr lang="en-US" sz="1500" dirty="0"/>
+            <a:endParaRPr lang="en-US" sz="1300" dirty="0"/>
           </a:p>
         </p:txBody>
       </p:sp>
@@ -15187,8 +16258,8 @@
         </p:nvSpPr>
         <p:spPr>
           <a:xfrm>
-            <a:off x="9258071" y="3282696"/>
-            <a:ext cx="2202104" cy="384048"/>
+            <a:off x="7552761" y="3282696"/>
+            <a:ext cx="1633667" cy="384048"/>
           </a:xfrm>
           <a:prstGeom prst="rect">
             <a:avLst/>
@@ -15204,14 +16275,14 @@
               <a:buNone/>
             </a:pPr>
             <a:r>
-              <a:rPr lang="en-US" sz="1300" dirty="0">
+              <a:rPr lang="en-US" sz="1200" dirty="0">
                 <a:solidFill>
                   <a:schemeClr val="tx2"/>
                 </a:solidFill>
               </a:rPr>
               <a:t>Proposition 5.3</a:t>
             </a:r>
-            <a:endParaRPr lang="en-US" sz="1300" dirty="0"/>
+            <a:endParaRPr lang="en-US" sz="1200" dirty="0"/>
           </a:p>
         </p:txBody>
       </p:sp>
@@ -15223,12 +16294,12 @@
         </p:nvSpPr>
         <p:spPr>
           <a:xfrm>
-            <a:off x="548640" y="4069080"/>
-            <a:ext cx="2567864" cy="2103120"/>
+            <a:off x="9643628" y="1691640"/>
+            <a:ext cx="1999427" cy="2103120"/>
           </a:xfrm>
           <a:prstGeom prst="roundRect">
             <a:avLst>
-              <a:gd name="adj" fmla="val 3478"/>
+              <a:gd name="adj" fmla="val 3659"/>
             </a:avLst>
           </a:prstGeom>
           <a:solidFill>
@@ -15250,8 +16321,8 @@
         </p:nvSpPr>
         <p:spPr>
           <a:xfrm>
-            <a:off x="731520" y="4197096"/>
-            <a:ext cx="2202104" cy="310896"/>
+            <a:off x="9826508" y="1819656"/>
+            <a:ext cx="1633667" cy="310896"/>
           </a:xfrm>
           <a:prstGeom prst="rect">
             <a:avLst/>
@@ -15286,8 +16357,8 @@
         </p:nvSpPr>
         <p:spPr>
           <a:xfrm>
-            <a:off x="731520" y="4526280"/>
-            <a:ext cx="2202104" cy="1060704"/>
+            <a:off x="9826508" y="2148840"/>
+            <a:ext cx="1633667" cy="1060704"/>
           </a:xfrm>
           <a:prstGeom prst="rect">
             <a:avLst/>
@@ -15303,7 +16374,7 @@
               <a:buNone/>
             </a:pPr>
             <a:r>
-              <a:rPr lang="en-US" sz="1500" b="1" dirty="0">
+              <a:rPr lang="en-US" sz="1300" b="1" dirty="0">
                 <a:solidFill>
                   <a:schemeClr val="tx1"/>
                 </a:solidFill>
@@ -15313,7 +16384,7 @@
               </a:rPr>
               <a:t>Horizons and Terminal Values</a:t>
             </a:r>
-            <a:endParaRPr lang="en-US" sz="1500" dirty="0"/>
+            <a:endParaRPr lang="en-US" sz="1300" dirty="0"/>
           </a:p>
         </p:txBody>
       </p:sp>
@@ -15325,8 +16396,8 @@
         </p:nvSpPr>
         <p:spPr>
           <a:xfrm>
-            <a:off x="731520" y="5660136"/>
-            <a:ext cx="2202104" cy="384048"/>
+            <a:off x="9826508" y="3282696"/>
+            <a:ext cx="1633667" cy="384048"/>
           </a:xfrm>
           <a:prstGeom prst="rect">
             <a:avLst/>
@@ -15342,14 +16413,14 @@
               <a:buNone/>
             </a:pPr>
             <a:r>
-              <a:rPr lang="en-US" sz="1300" dirty="0">
+              <a:rPr lang="en-US" sz="1200" dirty="0">
                 <a:solidFill>
                   <a:schemeClr val="tx2"/>
                 </a:solidFill>
               </a:rPr>
               <a:t>Theorem 5.2 · Figure 5.2</a:t>
             </a:r>
-            <a:endParaRPr lang="en-US" sz="1300" dirty="0"/>
+            <a:endParaRPr lang="en-US" sz="1200" dirty="0"/>
           </a:p>
         </p:txBody>
       </p:sp>
@@ -15361,12 +16432,12 @@
         </p:nvSpPr>
         <p:spPr>
           <a:xfrm>
-            <a:off x="3390824" y="4069080"/>
-            <a:ext cx="2567864" cy="2103120"/>
+            <a:off x="548640" y="4069080"/>
+            <a:ext cx="1999427" cy="2103120"/>
           </a:xfrm>
           <a:prstGeom prst="roundRect">
             <a:avLst>
-              <a:gd name="adj" fmla="val 3478"/>
+              <a:gd name="adj" fmla="val 3659"/>
             </a:avLst>
           </a:prstGeom>
           <a:solidFill>
@@ -15388,8 +16459,8 @@
         </p:nvSpPr>
         <p:spPr>
           <a:xfrm>
-            <a:off x="3573704" y="4197096"/>
-            <a:ext cx="2202104" cy="310896"/>
+            <a:off x="731520" y="4197096"/>
+            <a:ext cx="1633667" cy="310896"/>
           </a:xfrm>
           <a:prstGeom prst="rect">
             <a:avLst/>
@@ -15424,8 +16495,8 @@
         </p:nvSpPr>
         <p:spPr>
           <a:xfrm>
-            <a:off x="3573704" y="4526280"/>
-            <a:ext cx="2202104" cy="1060704"/>
+            <a:off x="731520" y="4526280"/>
+            <a:ext cx="1633667" cy="1060704"/>
           </a:xfrm>
           <a:prstGeom prst="rect">
             <a:avLst/>
@@ -15441,7 +16512,7 @@
               <a:buNone/>
             </a:pPr>
             <a:r>
-              <a:rPr lang="en-US" sz="1500" b="1" dirty="0">
+              <a:rPr lang="en-US" sz="1300" b="1" dirty="0">
                 <a:solidFill>
                   <a:schemeClr val="tx1"/>
                 </a:solidFill>
@@ -15451,7 +16522,7 @@
               </a:rPr>
               <a:t>Plans, Rules, and Re-planning</a:t>
             </a:r>
-            <a:endParaRPr lang="en-US" sz="1500" dirty="0"/>
+            <a:endParaRPr lang="en-US" sz="1300" dirty="0"/>
           </a:p>
         </p:txBody>
       </p:sp>
@@ -15463,8 +16534,8 @@
         </p:nvSpPr>
         <p:spPr>
           <a:xfrm>
-            <a:off x="3573704" y="5660136"/>
-            <a:ext cx="2202104" cy="384048"/>
+            <a:off x="731520" y="5660136"/>
+            <a:ext cx="1633667" cy="384048"/>
           </a:xfrm>
           <a:prstGeom prst="rect">
             <a:avLst/>
@@ -15480,14 +16551,14 @@
               <a:buNone/>
             </a:pPr>
             <a:r>
-              <a:rPr lang="en-US" sz="1300" dirty="0">
+              <a:rPr lang="en-US" sz="1200" dirty="0">
                 <a:solidFill>
                   <a:schemeClr val="tx2"/>
                 </a:solidFill>
               </a:rPr>
               <a:t>Definition 5.2 · Theorem 5.3</a:t>
             </a:r>
-            <a:endParaRPr lang="en-US" sz="1300" dirty="0"/>
+            <a:endParaRPr lang="en-US" sz="1200" dirty="0"/>
           </a:p>
         </p:txBody>
       </p:sp>
@@ -15499,12 +16570,12 @@
         </p:nvSpPr>
         <p:spPr>
           <a:xfrm>
-            <a:off x="6233008" y="4069080"/>
-            <a:ext cx="2567864" cy="2103120"/>
+            <a:off x="2822387" y="4069080"/>
+            <a:ext cx="1999427" cy="2103120"/>
           </a:xfrm>
           <a:prstGeom prst="roundRect">
             <a:avLst>
-              <a:gd name="adj" fmla="val 3478"/>
+              <a:gd name="adj" fmla="val 3659"/>
             </a:avLst>
           </a:prstGeom>
           <a:solidFill>
@@ -15526,8 +16597,8 @@
         </p:nvSpPr>
         <p:spPr>
           <a:xfrm>
-            <a:off x="6415888" y="4197096"/>
-            <a:ext cx="2202104" cy="310896"/>
+            <a:off x="3005267" y="4197096"/>
+            <a:ext cx="1633667" cy="310896"/>
           </a:xfrm>
           <a:prstGeom prst="rect">
             <a:avLst/>
@@ -15562,8 +16633,8 @@
         </p:nvSpPr>
         <p:spPr>
           <a:xfrm>
-            <a:off x="6415888" y="4526280"/>
-            <a:ext cx="2202104" cy="1060704"/>
+            <a:off x="3005267" y="4526280"/>
+            <a:ext cx="1633667" cy="1060704"/>
           </a:xfrm>
           <a:prstGeom prst="rect">
             <a:avLst/>
@@ -15579,7 +16650,7 @@
               <a:buNone/>
             </a:pPr>
             <a:r>
-              <a:rPr lang="en-US" sz="1500" b="1" dirty="0">
+              <a:rPr lang="en-US" sz="1300" b="1" dirty="0">
                 <a:solidFill>
                   <a:schemeClr val="bg1"/>
                 </a:solidFill>
@@ -15589,7 +16660,7 @@
               </a:rPr>
               <a:t>When Should Meridian Pay Its Shareholders?</a:t>
             </a:r>
-            <a:endParaRPr lang="en-US" sz="1500" dirty="0"/>
+            <a:endParaRPr lang="en-US" sz="1300" dirty="0"/>
           </a:p>
         </p:txBody>
       </p:sp>
@@ -15601,8 +16672,8 @@
         </p:nvSpPr>
         <p:spPr>
           <a:xfrm>
-            <a:off x="6415888" y="5660136"/>
-            <a:ext cx="2202104" cy="384048"/>
+            <a:off x="3005267" y="5660136"/>
+            <a:ext cx="1633667" cy="384048"/>
           </a:xfrm>
           <a:prstGeom prst="rect">
             <a:avLst/>
@@ -15618,14 +16689,14 @@
               <a:buNone/>
             </a:pPr>
             <a:r>
-              <a:rPr lang="en-US" sz="1300" dirty="0">
+              <a:rPr lang="en-US" sz="1200" dirty="0">
                 <a:solidFill>
                   <a:schemeClr val="bg2"/>
                 </a:solidFill>
               </a:rPr>
               <a:t>Table 5.3 · Figure 5.3</a:t>
             </a:r>
-            <a:endParaRPr lang="en-US" sz="1300" dirty="0"/>
+            <a:endParaRPr lang="en-US" sz="1200" dirty="0"/>
           </a:p>
         </p:txBody>
       </p:sp>
@@ -15637,12 +16708,12 @@
         </p:nvSpPr>
         <p:spPr>
           <a:xfrm>
-            <a:off x="9075191" y="4069080"/>
-            <a:ext cx="2567864" cy="2103120"/>
+            <a:off x="5096134" y="4069080"/>
+            <a:ext cx="1999427" cy="2103120"/>
           </a:xfrm>
           <a:prstGeom prst="roundRect">
             <a:avLst>
-              <a:gd name="adj" fmla="val 3478"/>
+              <a:gd name="adj" fmla="val 3659"/>
             </a:avLst>
           </a:prstGeom>
           <a:solidFill>
@@ -15664,8 +16735,8 @@
         </p:nvSpPr>
         <p:spPr>
           <a:xfrm>
-            <a:off x="9258071" y="4197096"/>
-            <a:ext cx="2202104" cy="310896"/>
+            <a:off x="5279014" y="4197096"/>
+            <a:ext cx="1633667" cy="310896"/>
           </a:xfrm>
           <a:prstGeom prst="rect">
             <a:avLst/>
@@ -15686,7 +16757,7 @@
                   <a:schemeClr val="accent1"/>
                 </a:solidFill>
               </a:rPr>
-              <a:t>AXIOM Lab 2.5</a:t>
+              <a:t>In Practice</a:t>
             </a:r>
             <a:endParaRPr lang="en-US" sz="1300" dirty="0"/>
           </a:p>
@@ -15700,8 +16771,8 @@
         </p:nvSpPr>
         <p:spPr>
           <a:xfrm>
-            <a:off x="9258071" y="4526280"/>
-            <a:ext cx="2202104" cy="1060704"/>
+            <a:off x="5279014" y="4526280"/>
+            <a:ext cx="1633667" cy="1060704"/>
           </a:xfrm>
           <a:prstGeom prst="rect">
             <a:avLst/>
@@ -15717,7 +16788,7 @@
               <a:buNone/>
             </a:pPr>
             <a:r>
-              <a:rPr lang="en-US" sz="1500" b="1" dirty="0">
+              <a:rPr lang="en-US" sz="1300" b="1" dirty="0">
                 <a:solidFill>
                   <a:schemeClr val="tx1"/>
                 </a:solidFill>
@@ -15725,9 +16796,9 @@
                 <a:ea typeface="Cambria" pitchFamily="34" charset="-122"/>
                 <a:cs typeface="Cambria" pitchFamily="34" charset="-120"/>
               </a:rPr>
-              <a:t>Planning over Time: Plans, Rules, and Horizons</a:t>
-            </a:r>
-            <a:endParaRPr lang="en-US" sz="1500" dirty="0"/>
+              <a:t>Zara Re-plans Its Clearance Every Week</a:t>
+            </a:r>
+            <a:endParaRPr lang="en-US" sz="1300" dirty="0"/>
           </a:p>
         </p:txBody>
       </p:sp>
@@ -15739,8 +16810,8 @@
         </p:nvSpPr>
         <p:spPr>
           <a:xfrm>
-            <a:off x="9258071" y="5660136"/>
-            <a:ext cx="2202104" cy="384048"/>
+            <a:off x="5279014" y="5660136"/>
+            <a:ext cx="1633667" cy="384048"/>
           </a:xfrm>
           <a:prstGeom prst="rect">
             <a:avLst/>
@@ -15756,14 +16827,152 @@
               <a:buNone/>
             </a:pPr>
             <a:r>
-              <a:rPr lang="en-US" sz="1300" dirty="0">
+              <a:rPr lang="en-US" sz="1200" dirty="0">
                 <a:solidFill>
                   <a:schemeClr val="tx2"/>
                 </a:solidFill>
               </a:rPr>
+              <a:t>At a Glance · board questions</a:t>
+            </a:r>
+            <a:endParaRPr lang="en-US" sz="1200" dirty="0"/>
+          </a:p>
+        </p:txBody>
+      </p:sp>
+      <p:sp>
+        <p:nvSpPr>
+          <p:cNvPr id="37" name="Card"/>
+          <p:cNvSpPr/>
+          <p:nvPr/>
+        </p:nvSpPr>
+        <p:spPr>
+          <a:xfrm>
+            <a:off x="7369881" y="4069080"/>
+            <a:ext cx="1999427" cy="2103120"/>
+          </a:xfrm>
+          <a:prstGeom prst="roundRect">
+            <a:avLst>
+              <a:gd name="adj" fmla="val 3659"/>
+            </a:avLst>
+          </a:prstGeom>
+          <a:solidFill>
+            <a:schemeClr val="bg2"/>
+          </a:solidFill>
+          <a:ln w="9525">
+            <a:solidFill>
+              <a:srgbClr val="C4CBD8"/>
+            </a:solidFill>
+            <a:prstDash val="solid"/>
+          </a:ln>
+        </p:spPr>
+      </p:sp>
+      <p:sp>
+        <p:nvSpPr>
+          <p:cNvPr id="38" name="Card label"/>
+          <p:cNvSpPr txBox="1"/>
+          <p:nvPr/>
+        </p:nvSpPr>
+        <p:spPr>
+          <a:xfrm>
+            <a:off x="7552761" y="4197096"/>
+            <a:ext cx="1633667" cy="310896"/>
+          </a:xfrm>
+          <a:prstGeom prst="rect">
+            <a:avLst/>
+          </a:prstGeom>
+          <a:noFill/>
+          <a:ln/>
+        </p:spPr>
+        <p:txBody>
+          <a:bodyPr wrap="square" lIns="0" tIns="0" rIns="0" bIns="0" rtlCol="0" anchor="ctr"/>
+          <a:lstStyle/>
+          <a:p>
+            <a:pPr indent="0" marL="0">
+              <a:buNone/>
+            </a:pPr>
+            <a:r>
+              <a:rPr lang="en-US" sz="1300" b="1" dirty="0">
+                <a:solidFill>
+                  <a:schemeClr val="accent1"/>
+                </a:solidFill>
+              </a:rPr>
+              <a:t>AXIOM Lab 2.5</a:t>
+            </a:r>
+            <a:endParaRPr lang="en-US" sz="1300" dirty="0"/>
+          </a:p>
+        </p:txBody>
+      </p:sp>
+      <p:sp>
+        <p:nvSpPr>
+          <p:cNvPr id="39" name="Card head"/>
+          <p:cNvSpPr txBox="1"/>
+          <p:nvPr/>
+        </p:nvSpPr>
+        <p:spPr>
+          <a:xfrm>
+            <a:off x="7552761" y="4526280"/>
+            <a:ext cx="1633667" cy="1060704"/>
+          </a:xfrm>
+          <a:prstGeom prst="rect">
+            <a:avLst/>
+          </a:prstGeom>
+          <a:noFill/>
+          <a:ln/>
+        </p:spPr>
+        <p:txBody>
+          <a:bodyPr wrap="square" lIns="0" tIns="0" rIns="0" bIns="0" rtlCol="0" anchor="t"/>
+          <a:lstStyle/>
+          <a:p>
+            <a:pPr indent="0" marL="0">
+              <a:buNone/>
+            </a:pPr>
+            <a:r>
+              <a:rPr lang="en-US" sz="1300" b="1" dirty="0">
+                <a:solidFill>
+                  <a:schemeClr val="tx1"/>
+                </a:solidFill>
+                <a:latin typeface="Cambria" pitchFamily="34" charset="0"/>
+                <a:ea typeface="Cambria" pitchFamily="34" charset="-122"/>
+                <a:cs typeface="Cambria" pitchFamily="34" charset="-120"/>
+              </a:rPr>
+              <a:t>Planning over Time: Plans, Rules, and Horizons</a:t>
+            </a:r>
+            <a:endParaRPr lang="en-US" sz="1300" dirty="0"/>
+          </a:p>
+        </p:txBody>
+      </p:sp>
+      <p:sp>
+        <p:nvSpPr>
+          <p:cNvPr id="40" name="Card text"/>
+          <p:cNvSpPr txBox="1"/>
+          <p:nvPr/>
+        </p:nvSpPr>
+        <p:spPr>
+          <a:xfrm>
+            <a:off x="7552761" y="5660136"/>
+            <a:ext cx="1633667" cy="384048"/>
+          </a:xfrm>
+          <a:prstGeom prst="rect">
+            <a:avLst/>
+          </a:prstGeom>
+          <a:noFill/>
+          <a:ln/>
+        </p:spPr>
+        <p:txBody>
+          <a:bodyPr wrap="square" lIns="0" tIns="0" rIns="0" bIns="0" rtlCol="0" anchor="t"/>
+          <a:lstStyle/>
+          <a:p>
+            <a:pPr indent="0" marL="0">
+              <a:buNone/>
+            </a:pPr>
+            <a:r>
+              <a:rPr lang="en-US" sz="1200" dirty="0">
+                <a:solidFill>
+                  <a:schemeClr val="tx2"/>
+                </a:solidFill>
+              </a:rPr>
               <a:t>AXIOM-05 · five steps</a:t>
             </a:r>
-            <a:endParaRPr lang="en-US" sz="1300" dirty="0"/>
+            <a:endParaRPr lang="en-US" sz="1200" dirty="0"/>
           </a:p>
         </p:txBody>
       </p:sp>
